--- a/ppt/MohammedHassanAhmed_X25100963_smart-city-monitoring.pptx
+++ b/ppt/MohammedHassanAhmed_X25100963_smart-city-monitoring.pptx
@@ -1163,7 +1163,7 @@
           <a:bodyPr wrap="square" rtlCol="0" anchor="t"/>
           <a:lstStyle/>
           <a:p>
-            <a:pPr algn="l" indent="0" marL="0">
+            <a:pPr indent="0" marL="0">
               <a:buNone/>
             </a:pPr>
             <a:r>
@@ -1314,7 +1314,7 @@
               <a:buNone/>
             </a:pPr>
             <a:r>
-              <a:rPr lang="en-US" sz="1400" b="1" dirty="0">
+              <a:rPr lang="en-US" sz="1350" b="1" dirty="0">
                 <a:solidFill>
                   <a:srgbClr val="E0A43E"/>
                 </a:solidFill>
@@ -1324,7 +1324,7 @@
               </a:rPr>
               <a:t>PM2.5 &gt; 35 µg/m³</a:t>
             </a:r>
-            <a:endParaRPr lang="en-US" sz="1400" dirty="0"/>
+            <a:endParaRPr lang="en-US" sz="1350" dirty="0"/>
           </a:p>
         </p:txBody>
       </p:sp>
@@ -1380,7 +1380,7 @@
               <a:buNone/>
             </a:pPr>
             <a:r>
-              <a:rPr lang="en-US" sz="1400" b="1" dirty="0">
+              <a:rPr lang="en-US" sz="1350" b="1" dirty="0">
                 <a:solidFill>
                   <a:srgbClr val="E0A43E"/>
                 </a:solidFill>
@@ -1390,7 +1390,7 @@
               </a:rPr>
               <a:t>Noise &gt; 75 dB</a:t>
             </a:r>
-            <a:endParaRPr lang="en-US" sz="1400" dirty="0"/>
+            <a:endParaRPr lang="en-US" sz="1350" dirty="0"/>
           </a:p>
         </p:txBody>
       </p:sp>
@@ -1446,7 +1446,7 @@
               <a:buNone/>
             </a:pPr>
             <a:r>
-              <a:rPr lang="en-US" sz="1400" b="1" dirty="0">
+              <a:rPr lang="en-US" sz="1350" b="1" dirty="0">
                 <a:solidFill>
                   <a:srgbClr val="E0A43E"/>
                 </a:solidFill>
@@ -1456,7 +1456,7 @@
               </a:rPr>
               <a:t>10 s alert window</a:t>
             </a:r>
-            <a:endParaRPr lang="en-US" sz="1400" dirty="0"/>
+            <a:endParaRPr lang="en-US" sz="1350" dirty="0"/>
           </a:p>
         </p:txBody>
       </p:sp>
@@ -1605,8 +1605,8 @@
         </p:nvSpPr>
         <p:spPr>
           <a:xfrm>
-            <a:off x="1325880" y="2670048"/>
-            <a:ext cx="201168" cy="201168"/>
+            <a:off x="1335024" y="2633472"/>
+            <a:ext cx="182880" cy="182880"/>
           </a:xfrm>
           <a:prstGeom prst="ellipse">
             <a:avLst/>
@@ -1625,8 +1625,8 @@
         </p:nvSpPr>
         <p:spPr>
           <a:xfrm>
-            <a:off x="594360" y="2926080"/>
-            <a:ext cx="1664208" cy="411480"/>
+            <a:off x="612648" y="2852928"/>
+            <a:ext cx="1627632" cy="365760"/>
           </a:xfrm>
           <a:prstGeom prst="rect">
             <a:avLst/>
@@ -1664,8 +1664,8 @@
         </p:nvSpPr>
         <p:spPr>
           <a:xfrm>
-            <a:off x="621792" y="3310128"/>
-            <a:ext cx="1609344" cy="457200"/>
+            <a:off x="640080" y="3200400"/>
+            <a:ext cx="1572768" cy="411480"/>
           </a:xfrm>
           <a:prstGeom prst="rect">
             <a:avLst/>
@@ -1754,8 +1754,8 @@
         </p:nvSpPr>
         <p:spPr>
           <a:xfrm>
-            <a:off x="3193633" y="2670048"/>
-            <a:ext cx="201168" cy="201168"/>
+            <a:off x="3202777" y="2633472"/>
+            <a:ext cx="182880" cy="182880"/>
           </a:xfrm>
           <a:prstGeom prst="ellipse">
             <a:avLst/>
@@ -1774,8 +1774,8 @@
         </p:nvSpPr>
         <p:spPr>
           <a:xfrm>
-            <a:off x="2462113" y="2926080"/>
-            <a:ext cx="1664208" cy="411480"/>
+            <a:off x="2480401" y="2852928"/>
+            <a:ext cx="1627632" cy="365760"/>
           </a:xfrm>
           <a:prstGeom prst="rect">
             <a:avLst/>
@@ -1813,8 +1813,8 @@
         </p:nvSpPr>
         <p:spPr>
           <a:xfrm>
-            <a:off x="2489545" y="3310128"/>
-            <a:ext cx="1609344" cy="457200"/>
+            <a:off x="2507833" y="3200400"/>
+            <a:ext cx="1572768" cy="411480"/>
           </a:xfrm>
           <a:prstGeom prst="rect">
             <a:avLst/>
@@ -1903,8 +1903,8 @@
         </p:nvSpPr>
         <p:spPr>
           <a:xfrm>
-            <a:off x="5061387" y="2670048"/>
-            <a:ext cx="201168" cy="201168"/>
+            <a:off x="5070531" y="2633472"/>
+            <a:ext cx="182880" cy="182880"/>
           </a:xfrm>
           <a:prstGeom prst="ellipse">
             <a:avLst/>
@@ -1923,8 +1923,8 @@
         </p:nvSpPr>
         <p:spPr>
           <a:xfrm>
-            <a:off x="4329867" y="2926080"/>
-            <a:ext cx="1664208" cy="411480"/>
+            <a:off x="4348155" y="2852928"/>
+            <a:ext cx="1627632" cy="365760"/>
           </a:xfrm>
           <a:prstGeom prst="rect">
             <a:avLst/>
@@ -1962,8 +1962,8 @@
         </p:nvSpPr>
         <p:spPr>
           <a:xfrm>
-            <a:off x="4357299" y="3310128"/>
-            <a:ext cx="1609344" cy="457200"/>
+            <a:off x="4375587" y="3200400"/>
+            <a:ext cx="1572768" cy="411480"/>
           </a:xfrm>
           <a:prstGeom prst="rect">
             <a:avLst/>
@@ -2052,8 +2052,8 @@
         </p:nvSpPr>
         <p:spPr>
           <a:xfrm>
-            <a:off x="6929140" y="2670048"/>
-            <a:ext cx="201168" cy="201168"/>
+            <a:off x="6938284" y="2633472"/>
+            <a:ext cx="182880" cy="182880"/>
           </a:xfrm>
           <a:prstGeom prst="ellipse">
             <a:avLst/>
@@ -2072,8 +2072,8 @@
         </p:nvSpPr>
         <p:spPr>
           <a:xfrm>
-            <a:off x="6197620" y="2926080"/>
-            <a:ext cx="1664208" cy="411480"/>
+            <a:off x="6215908" y="2852928"/>
+            <a:ext cx="1627632" cy="365760"/>
           </a:xfrm>
           <a:prstGeom prst="rect">
             <a:avLst/>
@@ -2111,8 +2111,8 @@
         </p:nvSpPr>
         <p:spPr>
           <a:xfrm>
-            <a:off x="6225052" y="3310128"/>
-            <a:ext cx="1609344" cy="457200"/>
+            <a:off x="6243340" y="3200400"/>
+            <a:ext cx="1572768" cy="411480"/>
           </a:xfrm>
           <a:prstGeom prst="rect">
             <a:avLst/>
@@ -2201,8 +2201,8 @@
         </p:nvSpPr>
         <p:spPr>
           <a:xfrm>
-            <a:off x="8796894" y="2670048"/>
-            <a:ext cx="201168" cy="201168"/>
+            <a:off x="8806038" y="2633472"/>
+            <a:ext cx="182880" cy="182880"/>
           </a:xfrm>
           <a:prstGeom prst="ellipse">
             <a:avLst/>
@@ -2221,8 +2221,8 @@
         </p:nvSpPr>
         <p:spPr>
           <a:xfrm>
-            <a:off x="8065374" y="2926080"/>
-            <a:ext cx="1664208" cy="411480"/>
+            <a:off x="8083662" y="2852928"/>
+            <a:ext cx="1627632" cy="365760"/>
           </a:xfrm>
           <a:prstGeom prst="rect">
             <a:avLst/>
@@ -2260,8 +2260,8 @@
         </p:nvSpPr>
         <p:spPr>
           <a:xfrm>
-            <a:off x="8092806" y="3310128"/>
-            <a:ext cx="1609344" cy="457200"/>
+            <a:off x="8111094" y="3200400"/>
+            <a:ext cx="1572768" cy="411480"/>
           </a:xfrm>
           <a:prstGeom prst="rect">
             <a:avLst/>
@@ -2350,8 +2350,8 @@
         </p:nvSpPr>
         <p:spPr>
           <a:xfrm>
-            <a:off x="10664647" y="2670048"/>
-            <a:ext cx="201168" cy="201168"/>
+            <a:off x="10673791" y="2633472"/>
+            <a:ext cx="182880" cy="182880"/>
           </a:xfrm>
           <a:prstGeom prst="ellipse">
             <a:avLst/>
@@ -2370,8 +2370,8 @@
         </p:nvSpPr>
         <p:spPr>
           <a:xfrm>
-            <a:off x="9933127" y="2926080"/>
-            <a:ext cx="1664208" cy="411480"/>
+            <a:off x="9951415" y="2852928"/>
+            <a:ext cx="1627632" cy="365760"/>
           </a:xfrm>
           <a:prstGeom prst="rect">
             <a:avLst/>
@@ -2409,8 +2409,8 @@
         </p:nvSpPr>
         <p:spPr>
           <a:xfrm>
-            <a:off x="9960559" y="3310128"/>
-            <a:ext cx="1609344" cy="457200"/>
+            <a:off x="9978847" y="3200400"/>
+            <a:ext cx="1572768" cy="411480"/>
           </a:xfrm>
           <a:prstGeom prst="rect">
             <a:avLst/>
@@ -2526,8 +2526,8 @@
         </p:nvSpPr>
         <p:spPr>
           <a:xfrm>
-            <a:off x="640080" y="5212080"/>
-            <a:ext cx="10972800" cy="640080"/>
+            <a:off x="640080" y="5257800"/>
+            <a:ext cx="10972800" cy="731520"/>
           </a:xfrm>
           <a:prstGeom prst="rect">
             <a:avLst/>
@@ -2759,7 +2759,7 @@
                 <a:ea typeface="Calibri" pitchFamily="34" charset="-122"/>
                 <a:cs typeface="Calibri" pitchFamily="34" charset="-120"/>
               </a:rPr>
-              <a:t>Pipeline health, all green</a:t>
+              <a:t>Two zones, five street metrics</a:t>
             </a:r>
             <a:endParaRPr lang="en-US" sz="1800" dirty="0"/>
           </a:p>
@@ -2798,7 +2798,7 @@
                 <a:ea typeface="Calibri" pitchFamily="34" charset="-122"/>
                 <a:cs typeface="Calibri" pitchFamily="34" charset="-120"/>
               </a:rPr>
-              <a:t>Edge relay online, queue reachable, Lambda deployed and records archiving — the whole chain live.</a:t>
+              <a:t>Traffic, air quality, noise, parking and visibility live for both city zones, with citywide trend charts.</a:t>
             </a:r>
             <a:endParaRPr lang="en-US" sz="1350" dirty="0"/>
           </a:p>
@@ -2896,7 +2896,7 @@
                 <a:ea typeface="Calibri" pitchFamily="34" charset="-122"/>
                 <a:cs typeface="Calibri" pitchFamily="34" charset="-120"/>
               </a:rPr>
-              <a:t>Two zones, five metrics</a:t>
+              <a:t>Five alert rules firing live</a:t>
             </a:r>
             <a:endParaRPr lang="en-US" sz="1800" dirty="0"/>
           </a:p>
@@ -2935,7 +2935,7 @@
                 <a:ea typeface="Calibri" pitchFamily="34" charset="-122"/>
                 <a:cs typeface="Calibri" pitchFamily="34" charset="-120"/>
               </a:rPr>
-              <a:t>Citywide trend charts with five alert rules firing live: congestion, air quality, noise, parking and low visibility.</a:t>
+              <a:t>Congestion, air-quality, noise, parking and low-visibility alerts each raise the instant a zone's window crosses its threshold.</a:t>
             </a:r>
             <a:endParaRPr lang="en-US" sz="1350" dirty="0"/>
           </a:p>
@@ -3033,7 +3033,7 @@
                 <a:ea typeface="Calibri" pitchFamily="34" charset="-122"/>
                 <a:cs typeface="Calibri" pitchFamily="34" charset="-120"/>
               </a:rPr>
-              <a:t>Tested and scales</a:t>
+              <a:t>A PM2.5 breach on real data</a:t>
             </a:r>
             <a:endParaRPr lang="en-US" sz="1800" dirty="0"/>
           </a:p>
@@ -3072,7 +3072,7 @@
                 <a:ea typeface="Calibri" pitchFamily="34" charset="-122"/>
                 <a:cs typeface="Calibri" pitchFamily="34" charset="-120"/>
               </a:rPr>
-              <a:t>62 automated tests pass across sensor, fog, processor and dashboard; a 2,000-message burst absorbed by 32 parallel workers.</a:t>
+              <a:t>Air quality tips over the 35 microgram limit on one zone and the air-quality alert appears within one ten-second window.</a:t>
             </a:r>
             <a:endParaRPr lang="en-US" sz="1350" dirty="0"/>
           </a:p>
@@ -3157,24 +3157,24 @@
         </p:nvSpPr>
         <p:spPr>
           <a:xfrm>
-            <a:off x="640080" y="640080"/>
-            <a:ext cx="10972800" cy="640080"/>
-          </a:xfrm>
-          <a:prstGeom prst="rect">
-            <a:avLst/>
-          </a:prstGeom>
-          <a:noFill/>
-          <a:ln/>
-        </p:spPr>
-        <p:txBody>
-          <a:bodyPr wrap="square" rtlCol="0" anchor="ctr"/>
+            <a:off x="640080" y="594360"/>
+            <a:ext cx="10972800" cy="822960"/>
+          </a:xfrm>
+          <a:prstGeom prst="rect">
+            <a:avLst/>
+          </a:prstGeom>
+          <a:noFill/>
+          <a:ln/>
+        </p:spPr>
+        <p:txBody>
+          <a:bodyPr wrap="square" rtlCol="0" anchor="t"/>
           <a:lstStyle/>
           <a:p>
             <a:pPr indent="0" marL="0">
               <a:buNone/>
             </a:pPr>
             <a:r>
-              <a:rPr lang="en-US" sz="3000" b="1" dirty="0">
+              <a:rPr lang="en-US" sz="2800" b="1" dirty="0">
                 <a:solidFill>
                   <a:srgbClr val="FFFFFF"/>
                 </a:solidFill>
@@ -3184,7 +3184,7 @@
               </a:rPr>
               <a:t>Hardest Part — a silent race at the window swap</a:t>
             </a:r>
-            <a:endParaRPr lang="en-US" sz="3000" dirty="0"/>
+            <a:endParaRPr lang="en-US" sz="2800" dirty="0"/>
           </a:p>
         </p:txBody>
       </p:sp>
@@ -3196,12 +3196,12 @@
         </p:nvSpPr>
         <p:spPr>
           <a:xfrm>
-            <a:off x="731520" y="1920240"/>
-            <a:ext cx="10698480" cy="1965960"/>
+            <a:off x="731520" y="1874520"/>
+            <a:ext cx="5212080" cy="4160520"/>
           </a:xfrm>
           <a:prstGeom prst="roundRect">
             <a:avLst>
-              <a:gd name="adj" fmla="val 4651"/>
+              <a:gd name="adj" fmla="val 2198"/>
             </a:avLst>
           </a:prstGeom>
           <a:solidFill>
@@ -3223,7 +3223,7 @@
         </p:nvSpPr>
         <p:spPr>
           <a:xfrm>
-            <a:off x="1005840" y="2103120"/>
+            <a:off x="1051560" y="2103120"/>
             <a:ext cx="3657600" cy="457200"/>
           </a:xfrm>
           <a:prstGeom prst="rect">
@@ -3262,8 +3262,8 @@
         </p:nvSpPr>
         <p:spPr>
           <a:xfrm>
-            <a:off x="1005840" y="2578608"/>
-            <a:ext cx="9966960" cy="1188720"/>
+            <a:off x="1051560" y="2651760"/>
+            <a:ext cx="4572000" cy="3200400"/>
           </a:xfrm>
           <a:prstGeom prst="rect">
             <a:avLst/>
@@ -3277,12 +3277,12 @@
           <a:p>
             <a:pPr indent="0" marL="0">
               <a:lnSpc>
-                <a:spcPct val="105000"/>
+                <a:spcPct val="110000"/>
               </a:lnSpc>
               <a:buNone/>
             </a:pPr>
             <a:r>
-              <a:rPr lang="en-US" sz="1300" dirty="0">
+              <a:rPr lang="en-US" sz="1350" dirty="0">
                 <a:solidFill>
                   <a:srgbClr val="CFDCE4"/>
                 </a:solidFill>
@@ -3292,7 +3292,7 @@
               </a:rPr>
               <a:t>Sensor posts run on four parallel threads while a timer swaps the window buffer out for flushing. A reading landing mid-swap can be written into the retired buffer after the flush has already read it — and it simply vanishes. Nothing fails; one number is just quietly missing.</a:t>
             </a:r>
-            <a:endParaRPr lang="en-US" sz="1300" dirty="0"/>
+            <a:endParaRPr lang="en-US" sz="1350" dirty="0"/>
           </a:p>
         </p:txBody>
       </p:sp>
@@ -3304,12 +3304,12 @@
         </p:nvSpPr>
         <p:spPr>
           <a:xfrm>
-            <a:off x="731520" y="4041648"/>
-            <a:ext cx="10698480" cy="1965960"/>
+            <a:off x="6263640" y="1874520"/>
+            <a:ext cx="5212080" cy="4160520"/>
           </a:xfrm>
           <a:prstGeom prst="roundRect">
             <a:avLst>
-              <a:gd name="adj" fmla="val 4651"/>
+              <a:gd name="adj" fmla="val 2198"/>
             </a:avLst>
           </a:prstGeom>
           <a:solidFill>
@@ -3331,7 +3331,7 @@
         </p:nvSpPr>
         <p:spPr>
           <a:xfrm>
-            <a:off x="1005840" y="4224528"/>
+            <a:off x="6583680" y="2103120"/>
             <a:ext cx="3657600" cy="457200"/>
           </a:xfrm>
           <a:prstGeom prst="rect">
@@ -3370,8 +3370,8 @@
         </p:nvSpPr>
         <p:spPr>
           <a:xfrm>
-            <a:off x="1005840" y="4700016"/>
-            <a:ext cx="9966960" cy="1188720"/>
+            <a:off x="6583680" y="2651760"/>
+            <a:ext cx="4572000" cy="3200400"/>
           </a:xfrm>
           <a:prstGeom prst="rect">
             <a:avLst/>
@@ -3385,12 +3385,12 @@
           <a:p>
             <a:pPr indent="0" marL="0">
               <a:lnSpc>
-                <a:spcPct val="105000"/>
+                <a:spcPct val="110000"/>
               </a:lnSpc>
               <a:buNone/>
             </a:pPr>
             <a:r>
-              <a:rPr lang="en-US" sz="1300" dirty="0">
+              <a:rPr lang="en-US" sz="1350" dirty="0">
                 <a:solidFill>
                   <a:srgbClr val="CFDCE4"/>
                 </a:solidFill>
@@ -3400,7 +3400,7 @@
               </a:rPr>
               <a:t>Each buffer became a fenced generation: the flush closes the fence, waits for writers already inside to finish, then reads; a writer arriving after the fence retries into the fresh buffer. The ingest path stays lock-free and every reading lands in exactly one window.</a:t>
             </a:r>
-            <a:endParaRPr lang="en-US" sz="1300" dirty="0"/>
+            <a:endParaRPr lang="en-US" sz="1350" dirty="0"/>
           </a:p>
         </p:txBody>
       </p:sp>

--- a/ppt/MohammedHassanAhmed_X25100963_smart-city-monitoring.pptx
+++ b/ppt/MohammedHassanAhmed_X25100963_smart-city-monitoring.pptx
@@ -3131,7 +3131,7 @@
     <p:bg>
       <p:bgPr>
         <a:solidFill>
-          <a:srgbClr val="14202B"/>
+          <a:srgbClr val="FFFFFF"/>
         </a:solidFill>
       </p:bgPr>
     </p:bg>
@@ -3157,7 +3157,7 @@
         </p:nvSpPr>
         <p:spPr>
           <a:xfrm>
-            <a:off x="640080" y="594360"/>
+            <a:off x="640080" y="502920"/>
             <a:ext cx="10972800" cy="822960"/>
           </a:xfrm>
           <a:prstGeom prst="rect">
@@ -3176,7 +3176,7 @@
             <a:r>
               <a:rPr lang="en-US" sz="2800" b="1" dirty="0">
                 <a:solidFill>
-                  <a:srgbClr val="FFFFFF"/>
+                  <a:srgbClr val="17232E"/>
                 </a:solidFill>
                 <a:latin typeface="Century Schoolbook" pitchFamily="34" charset="0"/>
                 <a:ea typeface="Century Schoolbook" pitchFamily="34" charset="-122"/>
@@ -3196,8 +3196,8 @@
         </p:nvSpPr>
         <p:spPr>
           <a:xfrm>
-            <a:off x="731520" y="1874520"/>
-            <a:ext cx="5212080" cy="4160520"/>
+            <a:off x="640080" y="1874520"/>
+            <a:ext cx="4937760" cy="4160520"/>
           </a:xfrm>
           <a:prstGeom prst="roundRect">
             <a:avLst>
@@ -3205,9 +3205,9 @@
             </a:avLst>
           </a:prstGeom>
           <a:solidFill>
-            <a:srgbClr val="1E3140"/>
-          </a:solidFill>
-          <a:ln w="15875">
+            <a:srgbClr val="EEF3F6"/>
+          </a:solidFill>
+          <a:ln w="19050">
             <a:solidFill>
               <a:srgbClr val="E0A43E"/>
             </a:solidFill>
@@ -3223,7 +3223,7 @@
         </p:nvSpPr>
         <p:spPr>
           <a:xfrm>
-            <a:off x="1051560" y="2103120"/>
+            <a:off x="960120" y="2103120"/>
             <a:ext cx="3657600" cy="457200"/>
           </a:xfrm>
           <a:prstGeom prst="rect">
@@ -3262,8 +3262,8 @@
         </p:nvSpPr>
         <p:spPr>
           <a:xfrm>
-            <a:off x="1051560" y="2651760"/>
-            <a:ext cx="4572000" cy="3200400"/>
+            <a:off x="960120" y="2651760"/>
+            <a:ext cx="4343400" cy="3200400"/>
           </a:xfrm>
           <a:prstGeom prst="rect">
             <a:avLst/>
@@ -3277,14 +3277,14 @@
           <a:p>
             <a:pPr indent="0" marL="0">
               <a:lnSpc>
-                <a:spcPct val="110000"/>
+                <a:spcPct val="112000"/>
               </a:lnSpc>
               <a:buNone/>
             </a:pPr>
             <a:r>
               <a:rPr lang="en-US" sz="1350" dirty="0">
                 <a:solidFill>
-                  <a:srgbClr val="CFDCE4"/>
+                  <a:srgbClr val="17232E"/>
                 </a:solidFill>
                 <a:latin typeface="Calibri" pitchFamily="34" charset="0"/>
                 <a:ea typeface="Calibri" pitchFamily="34" charset="-122"/>
@@ -3304,8 +3304,8 @@
         </p:nvSpPr>
         <p:spPr>
           <a:xfrm>
-            <a:off x="6263640" y="1874520"/>
-            <a:ext cx="5212080" cy="4160520"/>
+            <a:off x="6611112" y="1874520"/>
+            <a:ext cx="4937760" cy="4160520"/>
           </a:xfrm>
           <a:prstGeom prst="roundRect">
             <a:avLst>
@@ -3313,11 +3313,11 @@
             </a:avLst>
           </a:prstGeom>
           <a:solidFill>
-            <a:srgbClr val="1E3140"/>
-          </a:solidFill>
-          <a:ln w="15875">
+            <a:srgbClr val="EEF3F6"/>
+          </a:solidFill>
+          <a:ln w="19050">
             <a:solidFill>
-              <a:srgbClr val="5E8399"/>
+              <a:srgbClr val="2E5E78"/>
             </a:solidFill>
             <a:prstDash val="solid"/>
           </a:ln>
@@ -3331,7 +3331,7 @@
         </p:nvSpPr>
         <p:spPr>
           <a:xfrm>
-            <a:off x="6583680" y="2103120"/>
+            <a:off x="6931152" y="2103120"/>
             <a:ext cx="3657600" cy="457200"/>
           </a:xfrm>
           <a:prstGeom prst="rect">
@@ -3350,7 +3350,7 @@
             <a:r>
               <a:rPr lang="en-US" sz="1900" b="1" dirty="0">
                 <a:solidFill>
-                  <a:srgbClr val="5E8399"/>
+                  <a:srgbClr val="2E5E78"/>
                 </a:solidFill>
                 <a:latin typeface="Century Schoolbook" pitchFamily="34" charset="0"/>
                 <a:ea typeface="Century Schoolbook" pitchFamily="34" charset="-122"/>
@@ -3370,8 +3370,8 @@
         </p:nvSpPr>
         <p:spPr>
           <a:xfrm>
-            <a:off x="6583680" y="2651760"/>
-            <a:ext cx="4572000" cy="3200400"/>
+            <a:off x="6931152" y="2651760"/>
+            <a:ext cx="4343400" cy="3200400"/>
           </a:xfrm>
           <a:prstGeom prst="rect">
             <a:avLst/>
@@ -3385,14 +3385,14 @@
           <a:p>
             <a:pPr indent="0" marL="0">
               <a:lnSpc>
-                <a:spcPct val="110000"/>
+                <a:spcPct val="112000"/>
               </a:lnSpc>
               <a:buNone/>
             </a:pPr>
             <a:r>
               <a:rPr lang="en-US" sz="1350" dirty="0">
                 <a:solidFill>
-                  <a:srgbClr val="CFDCE4"/>
+                  <a:srgbClr val="17232E"/>
                 </a:solidFill>
                 <a:latin typeface="Calibri" pitchFamily="34" charset="0"/>
                 <a:ea typeface="Calibri" pitchFamily="34" charset="-122"/>
@@ -3403,6 +3403,26 @@
             <a:endParaRPr lang="en-US" sz="1350" dirty="0"/>
           </a:p>
         </p:txBody>
+      </p:sp>
+      <p:sp>
+        <p:nvSpPr>
+          <p:cNvPr id="9" name="Shape 7"/>
+          <p:cNvSpPr/>
+          <p:nvPr/>
+        </p:nvSpPr>
+        <p:spPr>
+          <a:xfrm>
+            <a:off x="5669280" y="3703320"/>
+            <a:ext cx="841248" cy="512064"/>
+          </a:xfrm>
+          <a:prstGeom prst="rightArrow">
+            <a:avLst/>
+          </a:prstGeom>
+          <a:solidFill>
+            <a:srgbClr val="1F3A4D"/>
+          </a:solidFill>
+          <a:ln/>
+        </p:spPr>
       </p:sp>
     </p:spTree>
   </p:cSld>

--- a/ppt/MohammedHassanAhmed_X25100963_smart-city-monitoring.pptx
+++ b/ppt/MohammedHassanAhmed_X25100963_smart-city-monitoring.pptx
@@ -1150,8 +1150,8 @@
         </p:nvSpPr>
         <p:spPr>
           <a:xfrm>
-            <a:off x="640080" y="914400"/>
-            <a:ext cx="10972800" cy="1280160"/>
+            <a:off x="640080" y="777240"/>
+            <a:ext cx="11064240" cy="2103120"/>
           </a:xfrm>
           <a:prstGeom prst="rect">
             <a:avLst/>
@@ -1164,10 +1164,13 @@
           <a:lstStyle/>
           <a:p>
             <a:pPr indent="0" marL="0">
-              <a:buNone/>
-            </a:pPr>
-            <a:r>
-              <a:rPr lang="en-US" sz="4000" b="1" dirty="0">
+              <a:lnSpc>
+                <a:spcPct val="98000"/>
+              </a:lnSpc>
+              <a:buNone/>
+            </a:pPr>
+            <a:r>
+              <a:rPr lang="en-US" sz="5200" b="1" dirty="0">
                 <a:solidFill>
                   <a:srgbClr val="FFFFFF"/>
                 </a:solidFill>
@@ -1177,7 +1180,7 @@
               </a:rPr>
               <a:t>Smart City Operations Monitoring</a:t>
             </a:r>
-            <a:endParaRPr lang="en-US" sz="4000" dirty="0"/>
+            <a:endParaRPr lang="en-US" sz="5200" dirty="0"/>
           </a:p>
         </p:txBody>
       </p:sp>
@@ -1189,7 +1192,7 @@
         </p:nvSpPr>
         <p:spPr>
           <a:xfrm>
-            <a:off x="658368" y="2148840"/>
+            <a:off x="658368" y="2971800"/>
             <a:ext cx="10972800" cy="365760"/>
           </a:xfrm>
           <a:prstGeom prst="rect">
@@ -1228,8 +1231,8 @@
         </p:nvSpPr>
         <p:spPr>
           <a:xfrm>
-            <a:off x="658368" y="2697480"/>
-            <a:ext cx="10424160" cy="1371600"/>
+            <a:off x="658368" y="3611880"/>
+            <a:ext cx="10424160" cy="1280160"/>
           </a:xfrm>
           <a:prstGeom prst="rect">
             <a:avLst/>
@@ -1243,12 +1246,12 @@
           <a:p>
             <a:pPr indent="0" marL="0">
               <a:lnSpc>
-                <a:spcPct val="110000"/>
+                <a:spcPct val="108000"/>
               </a:lnSpc>
               <a:buNone/>
             </a:pPr>
             <a:r>
-              <a:rPr lang="en-US" sz="2000" dirty="0">
+              <a:rPr lang="en-US" sz="1900" dirty="0">
                 <a:solidFill>
                   <a:srgbClr val="CFDCE4"/>
                 </a:solidFill>
@@ -1258,7 +1261,7 @@
               </a:rPr>
               <a:t>Congestion, pollution spikes and full car parks build and fade within minutes — between any two manual checks, the breach that matters happens after the clipboard leaves.</a:t>
             </a:r>
-            <a:endParaRPr lang="en-US" sz="2000" dirty="0"/>
+            <a:endParaRPr lang="en-US" sz="1900" dirty="0"/>
           </a:p>
         </p:txBody>
       </p:sp>
@@ -1270,7 +1273,7 @@
         </p:nvSpPr>
         <p:spPr>
           <a:xfrm>
-            <a:off x="658368" y="4206240"/>
+            <a:off x="658368" y="5074920"/>
             <a:ext cx="2651760" cy="566928"/>
           </a:xfrm>
           <a:prstGeom prst="roundRect">
@@ -1297,7 +1300,7 @@
         </p:nvSpPr>
         <p:spPr>
           <a:xfrm>
-            <a:off x="658368" y="4206240"/>
+            <a:off x="658368" y="5074920"/>
             <a:ext cx="2651760" cy="566928"/>
           </a:xfrm>
           <a:prstGeom prst="rect">
@@ -1336,7 +1339,7 @@
         </p:nvSpPr>
         <p:spPr>
           <a:xfrm>
-            <a:off x="3538728" y="4206240"/>
+            <a:off x="3538728" y="5074920"/>
             <a:ext cx="2651760" cy="566928"/>
           </a:xfrm>
           <a:prstGeom prst="roundRect">
@@ -1363,7 +1366,7 @@
         </p:nvSpPr>
         <p:spPr>
           <a:xfrm>
-            <a:off x="3538728" y="4206240"/>
+            <a:off x="3538728" y="5074920"/>
             <a:ext cx="2651760" cy="566928"/>
           </a:xfrm>
           <a:prstGeom prst="rect">
@@ -1402,7 +1405,7 @@
         </p:nvSpPr>
         <p:spPr>
           <a:xfrm>
-            <a:off x="6419088" y="4206240"/>
+            <a:off x="6419088" y="5074920"/>
             <a:ext cx="2651760" cy="566928"/>
           </a:xfrm>
           <a:prstGeom prst="roundRect">
@@ -1429,7 +1432,7 @@
         </p:nvSpPr>
         <p:spPr>
           <a:xfrm>
-            <a:off x="6419088" y="4206240"/>
+            <a:off x="6419088" y="5074920"/>
             <a:ext cx="2651760" cy="566928"/>
           </a:xfrm>
           <a:prstGeom prst="rect">
@@ -1468,8 +1471,8 @@
         </p:nvSpPr>
         <p:spPr>
           <a:xfrm>
-            <a:off x="658368" y="6126480"/>
-            <a:ext cx="10972800" cy="365760"/>
+            <a:off x="658368" y="6355080"/>
+            <a:ext cx="10972800" cy="320040"/>
           </a:xfrm>
           <a:prstGeom prst="rect">
             <a:avLst/>
@@ -1485,7 +1488,7 @@
               <a:buNone/>
             </a:pPr>
             <a:r>
-              <a:rPr lang="en-US" sz="1300" dirty="0">
+              <a:rPr lang="en-US" sz="1250" dirty="0">
                 <a:solidFill>
                   <a:srgbClr val="5E6E78"/>
                 </a:solidFill>
@@ -1495,7 +1498,7 @@
               </a:rPr>
               <a:t>Fog &amp; Edge Computing (H9FECC)   ·   deployed live on AWS</a:t>
             </a:r>
-            <a:endParaRPr lang="en-US" sz="1300" dirty="0"/>
+            <a:endParaRPr lang="en-US" sz="1250" dirty="0"/>
           </a:p>
         </p:txBody>
       </p:sp>
@@ -1578,12 +1581,12 @@
         </p:nvSpPr>
         <p:spPr>
           <a:xfrm>
-            <a:off x="640080" y="2468880"/>
-            <a:ext cx="1572768" cy="1371600"/>
+            <a:off x="640080" y="1554480"/>
+            <a:ext cx="3200400" cy="3383280"/>
           </a:xfrm>
           <a:prstGeom prst="roundRect">
             <a:avLst>
-              <a:gd name="adj" fmla="val 6667"/>
+              <a:gd name="adj" fmla="val 2857"/>
             </a:avLst>
           </a:prstGeom>
           <a:solidFill>
@@ -1599,62 +1602,69 @@
       </p:sp>
       <p:sp>
         <p:nvSpPr>
-          <p:cNvPr id="4" name="Shape 2"/>
-          <p:cNvSpPr/>
-          <p:nvPr/>
-        </p:nvSpPr>
-        <p:spPr>
-          <a:xfrm>
-            <a:off x="1335024" y="2633472"/>
-            <a:ext cx="182880" cy="182880"/>
-          </a:xfrm>
-          <a:prstGeom prst="ellipse">
-            <a:avLst/>
-          </a:prstGeom>
-          <a:solidFill>
-            <a:srgbClr val="5E8399"/>
-          </a:solidFill>
-          <a:ln/>
-        </p:spPr>
-      </p:sp>
-      <p:sp>
-        <p:nvSpPr>
-          <p:cNvPr id="5" name="Text 3"/>
-          <p:cNvSpPr/>
-          <p:nvPr/>
-        </p:nvSpPr>
-        <p:spPr>
-          <a:xfrm>
-            <a:off x="612648" y="2852928"/>
-            <a:ext cx="1627632" cy="365760"/>
-          </a:xfrm>
-          <a:prstGeom prst="rect">
-            <a:avLst/>
-          </a:prstGeom>
-          <a:noFill/>
-          <a:ln/>
-        </p:spPr>
-        <p:txBody>
-          <a:bodyPr wrap="square" lIns="0" tIns="0" rIns="0" bIns="0" rtlCol="0" anchor="ctr"/>
+          <p:cNvPr id="4" name="Text 2"/>
+          <p:cNvSpPr/>
+          <p:nvPr/>
+        </p:nvSpPr>
+        <p:spPr>
+          <a:xfrm>
+            <a:off x="640080" y="1691640"/>
+            <a:ext cx="3200400" cy="365760"/>
+          </a:xfrm>
+          <a:prstGeom prst="rect">
+            <a:avLst/>
+          </a:prstGeom>
+          <a:noFill/>
+          <a:ln/>
+        </p:spPr>
+        <p:txBody>
+          <a:bodyPr wrap="square" rtlCol="0" anchor="ctr"/>
           <a:lstStyle/>
           <a:p>
             <a:pPr algn="ctr" indent="0" marL="0">
               <a:buNone/>
             </a:pPr>
             <a:r>
-              <a:rPr lang="en-US" sz="1450" b="1" dirty="0">
-                <a:solidFill>
-                  <a:srgbClr val="17232E"/>
+              <a:rPr lang="en-US" sz="1200" b="1" spc="300" kern="0" dirty="0">
+                <a:solidFill>
+                  <a:srgbClr val="5E8399"/>
                 </a:solidFill>
                 <a:latin typeface="Calibri" pitchFamily="34" charset="0"/>
                 <a:ea typeface="Calibri" pitchFamily="34" charset="-122"/>
                 <a:cs typeface="Calibri" pitchFamily="34" charset="-120"/>
               </a:rPr>
-              <a:t>Street sensors</a:t>
-            </a:r>
-            <a:endParaRPr lang="en-US" sz="1450" dirty="0"/>
-          </a:p>
-        </p:txBody>
+              <a:t>EDGE</a:t>
+            </a:r>
+            <a:endParaRPr lang="en-US" sz="1200" dirty="0"/>
+          </a:p>
+        </p:txBody>
+      </p:sp>
+      <p:sp>
+        <p:nvSpPr>
+          <p:cNvPr id="5" name="Shape 3"/>
+          <p:cNvSpPr/>
+          <p:nvPr/>
+        </p:nvSpPr>
+        <p:spPr>
+          <a:xfrm>
+            <a:off x="914400" y="2286000"/>
+            <a:ext cx="2651760" cy="1005840"/>
+          </a:xfrm>
+          <a:prstGeom prst="roundRect">
+            <a:avLst>
+              <a:gd name="adj" fmla="val 7273"/>
+            </a:avLst>
+          </a:prstGeom>
+          <a:solidFill>
+            <a:srgbClr val="FFFFFF"/>
+          </a:solidFill>
+          <a:ln w="15240">
+            <a:solidFill>
+              <a:srgbClr val="5E8399"/>
+            </a:solidFill>
+            <a:prstDash val="solid"/>
+          </a:ln>
+        </p:spPr>
       </p:sp>
       <p:sp>
         <p:nvSpPr>
@@ -1664,53 +1674,392 @@
         </p:nvSpPr>
         <p:spPr>
           <a:xfrm>
-            <a:off x="640080" y="3200400"/>
-            <a:ext cx="1572768" cy="411480"/>
-          </a:xfrm>
-          <a:prstGeom prst="rect">
-            <a:avLst/>
-          </a:prstGeom>
-          <a:noFill/>
-          <a:ln/>
-        </p:spPr>
-        <p:txBody>
-          <a:bodyPr wrap="square" lIns="0" tIns="0" rIns="0" bIns="0" rtlCol="0" anchor="t"/>
+            <a:off x="914400" y="2432304"/>
+            <a:ext cx="2651760" cy="365760"/>
+          </a:xfrm>
+          <a:prstGeom prst="rect">
+            <a:avLst/>
+          </a:prstGeom>
+          <a:noFill/>
+          <a:ln/>
+        </p:spPr>
+        <p:txBody>
+          <a:bodyPr wrap="square" lIns="0" tIns="0" rIns="0" bIns="0" rtlCol="0" anchor="ctr"/>
           <a:lstStyle/>
           <a:p>
             <a:pPr algn="ctr" indent="0" marL="0">
               <a:buNone/>
             </a:pPr>
             <a:r>
-              <a:rPr lang="en-US" sz="1050" dirty="0">
-                <a:solidFill>
-                  <a:srgbClr val="5E6E78"/>
+              <a:rPr lang="en-US" sz="1400" b="1" dirty="0">
+                <a:solidFill>
+                  <a:srgbClr val="17232E"/>
                 </a:solidFill>
                 <a:latin typeface="Calibri" pitchFamily="34" charset="0"/>
                 <a:ea typeface="Calibri" pitchFamily="34" charset="-122"/>
                 <a:cs typeface="Calibri" pitchFamily="34" charset="-120"/>
               </a:rPr>
+              <a:t>Street sensors</a:t>
+            </a:r>
+            <a:endParaRPr lang="en-US" sz="1400" dirty="0"/>
+          </a:p>
+        </p:txBody>
+      </p:sp>
+      <p:sp>
+        <p:nvSpPr>
+          <p:cNvPr id="7" name="Text 5"/>
+          <p:cNvSpPr/>
+          <p:nvPr/>
+        </p:nvSpPr>
+        <p:spPr>
+          <a:xfrm>
+            <a:off x="914400" y="2816352"/>
+            <a:ext cx="2651760" cy="365760"/>
+          </a:xfrm>
+          <a:prstGeom prst="rect">
+            <a:avLst/>
+          </a:prstGeom>
+          <a:noFill/>
+          <a:ln/>
+        </p:spPr>
+        <p:txBody>
+          <a:bodyPr wrap="square" lIns="0" tIns="0" rIns="0" bIns="0" rtlCol="0" anchor="ctr"/>
+          <a:lstStyle/>
+          <a:p>
+            <a:pPr algn="ctr" indent="0" marL="0">
+              <a:buNone/>
+            </a:pPr>
+            <a:r>
+              <a:rPr lang="en-US" sz="1000" dirty="0">
+                <a:solidFill>
+                  <a:srgbClr val="5E6E78"/>
+                </a:solidFill>
+                <a:latin typeface="Calibri" pitchFamily="34" charset="0"/>
+                <a:ea typeface="Calibri" pitchFamily="34" charset="-122"/>
+                <a:cs typeface="Calibri" pitchFamily="34" charset="-120"/>
+              </a:rPr>
               <a:t>10 devices · 2 zones</a:t>
             </a:r>
-            <a:endParaRPr lang="en-US" sz="1050" dirty="0"/>
-          </a:p>
-        </p:txBody>
-      </p:sp>
-      <p:sp>
-        <p:nvSpPr>
-          <p:cNvPr id="7" name="Shape 5"/>
-          <p:cNvSpPr/>
-          <p:nvPr/>
-        </p:nvSpPr>
-        <p:spPr>
-          <a:xfrm>
-            <a:off x="2231136" y="3154680"/>
-            <a:ext cx="258409" cy="0"/>
+            <a:endParaRPr lang="en-US" sz="1000" dirty="0"/>
+          </a:p>
+        </p:txBody>
+      </p:sp>
+      <p:sp>
+        <p:nvSpPr>
+          <p:cNvPr id="8" name="Shape 6"/>
+          <p:cNvSpPr/>
+          <p:nvPr/>
+        </p:nvSpPr>
+        <p:spPr>
+          <a:xfrm>
+            <a:off x="914400" y="3520440"/>
+            <a:ext cx="2651760" cy="1005840"/>
+          </a:xfrm>
+          <a:prstGeom prst="roundRect">
+            <a:avLst>
+              <a:gd name="adj" fmla="val 7273"/>
+            </a:avLst>
+          </a:prstGeom>
+          <a:solidFill>
+            <a:srgbClr val="FFFFFF"/>
+          </a:solidFill>
+          <a:ln w="15240">
+            <a:solidFill>
+              <a:srgbClr val="5E8399"/>
+            </a:solidFill>
+            <a:prstDash val="solid"/>
+          </a:ln>
+        </p:spPr>
+      </p:sp>
+      <p:sp>
+        <p:nvSpPr>
+          <p:cNvPr id="9" name="Text 7"/>
+          <p:cNvSpPr/>
+          <p:nvPr/>
+        </p:nvSpPr>
+        <p:spPr>
+          <a:xfrm>
+            <a:off x="914400" y="3666744"/>
+            <a:ext cx="2651760" cy="365760"/>
+          </a:xfrm>
+          <a:prstGeom prst="rect">
+            <a:avLst/>
+          </a:prstGeom>
+          <a:noFill/>
+          <a:ln/>
+        </p:spPr>
+        <p:txBody>
+          <a:bodyPr wrap="square" lIns="0" tIns="0" rIns="0" bIns="0" rtlCol="0" anchor="ctr"/>
+          <a:lstStyle/>
+          <a:p>
+            <a:pPr algn="ctr" indent="0" marL="0">
+              <a:buNone/>
+            </a:pPr>
+            <a:r>
+              <a:rPr lang="en-US" sz="1400" b="1" dirty="0">
+                <a:solidFill>
+                  <a:srgbClr val="17232E"/>
+                </a:solidFill>
+                <a:latin typeface="Calibri" pitchFamily="34" charset="0"/>
+                <a:ea typeface="Calibri" pitchFamily="34" charset="-122"/>
+                <a:cs typeface="Calibri" pitchFamily="34" charset="-120"/>
+              </a:rPr>
+              <a:t>Fog relay</a:t>
+            </a:r>
+            <a:endParaRPr lang="en-US" sz="1400" dirty="0"/>
+          </a:p>
+        </p:txBody>
+      </p:sp>
+      <p:sp>
+        <p:nvSpPr>
+          <p:cNvPr id="10" name="Text 8"/>
+          <p:cNvSpPr/>
+          <p:nvPr/>
+        </p:nvSpPr>
+        <p:spPr>
+          <a:xfrm>
+            <a:off x="914400" y="4050792"/>
+            <a:ext cx="2651760" cy="365760"/>
+          </a:xfrm>
+          <a:prstGeom prst="rect">
+            <a:avLst/>
+          </a:prstGeom>
+          <a:noFill/>
+          <a:ln/>
+        </p:spPr>
+        <p:txBody>
+          <a:bodyPr wrap="square" lIns="0" tIns="0" rIns="0" bIns="0" rtlCol="0" anchor="ctr"/>
+          <a:lstStyle/>
+          <a:p>
+            <a:pPr algn="ctr" indent="0" marL="0">
+              <a:buNone/>
+            </a:pPr>
+            <a:r>
+              <a:rPr lang="en-US" sz="1000" dirty="0">
+                <a:solidFill>
+                  <a:srgbClr val="5E6E78"/>
+                </a:solidFill>
+                <a:latin typeface="Calibri" pitchFamily="34" charset="0"/>
+                <a:ea typeface="Calibri" pitchFamily="34" charset="-122"/>
+                <a:cs typeface="Calibri" pitchFamily="34" charset="-120"/>
+              </a:rPr>
+              <a:t>10 s windows · 5 rules</a:t>
+            </a:r>
+            <a:endParaRPr lang="en-US" sz="1000" dirty="0"/>
+          </a:p>
+        </p:txBody>
+      </p:sp>
+      <p:sp>
+        <p:nvSpPr>
+          <p:cNvPr id="11" name="Shape 9"/>
+          <p:cNvSpPr/>
+          <p:nvPr/>
+        </p:nvSpPr>
+        <p:spPr>
+          <a:xfrm>
+            <a:off x="3886200" y="3246120"/>
+            <a:ext cx="502920" cy="0"/>
           </a:xfrm>
           <a:prstGeom prst="line">
             <a:avLst/>
           </a:prstGeom>
           <a:noFill/>
-          <a:ln w="25400">
+          <a:ln w="31750">
+            <a:solidFill>
+              <a:srgbClr val="1F3A4D"/>
+            </a:solidFill>
+            <a:prstDash val="solid"/>
+            <a:tailEnd type="triangle"/>
+          </a:ln>
+        </p:spPr>
+      </p:sp>
+      <p:sp>
+        <p:nvSpPr>
+          <p:cNvPr id="12" name="Shape 10"/>
+          <p:cNvSpPr/>
+          <p:nvPr/>
+        </p:nvSpPr>
+        <p:spPr>
+          <a:xfrm>
+            <a:off x="4572000" y="1554480"/>
+            <a:ext cx="6949440" cy="3383280"/>
+          </a:xfrm>
+          <a:prstGeom prst="roundRect">
+            <a:avLst>
+              <a:gd name="adj" fmla="val 2703"/>
+            </a:avLst>
+          </a:prstGeom>
+          <a:solidFill>
+            <a:srgbClr val="EEF3F6"/>
+          </a:solidFill>
+          <a:ln w="19050">
+            <a:solidFill>
+              <a:srgbClr val="1F3A4D"/>
+            </a:solidFill>
+            <a:prstDash val="solid"/>
+          </a:ln>
+        </p:spPr>
+      </p:sp>
+      <p:sp>
+        <p:nvSpPr>
+          <p:cNvPr id="13" name="Text 11"/>
+          <p:cNvSpPr/>
+          <p:nvPr/>
+        </p:nvSpPr>
+        <p:spPr>
+          <a:xfrm>
+            <a:off x="4572000" y="1691640"/>
+            <a:ext cx="6949440" cy="365760"/>
+          </a:xfrm>
+          <a:prstGeom prst="rect">
+            <a:avLst/>
+          </a:prstGeom>
+          <a:noFill/>
+          <a:ln/>
+        </p:spPr>
+        <p:txBody>
+          <a:bodyPr wrap="square" rtlCol="0" anchor="ctr"/>
+          <a:lstStyle/>
+          <a:p>
+            <a:pPr algn="ctr" indent="0" marL="0">
+              <a:buNone/>
+            </a:pPr>
+            <a:r>
+              <a:rPr lang="en-US" sz="1200" b="1" spc="200" kern="0" dirty="0">
+                <a:solidFill>
+                  <a:srgbClr val="1F3A4D"/>
+                </a:solidFill>
+                <a:latin typeface="Calibri" pitchFamily="34" charset="0"/>
+                <a:ea typeface="Calibri" pitchFamily="34" charset="-122"/>
+                <a:cs typeface="Calibri" pitchFamily="34" charset="-120"/>
+              </a:rPr>
+              <a:t>CLOUD (serverless)</a:t>
+            </a:r>
+            <a:endParaRPr lang="en-US" sz="1200" dirty="0"/>
+          </a:p>
+        </p:txBody>
+      </p:sp>
+      <p:sp>
+        <p:nvSpPr>
+          <p:cNvPr id="14" name="Shape 12"/>
+          <p:cNvSpPr/>
+          <p:nvPr/>
+        </p:nvSpPr>
+        <p:spPr>
+          <a:xfrm>
+            <a:off x="4846320" y="2651760"/>
+            <a:ext cx="1463040" cy="1371600"/>
+          </a:xfrm>
+          <a:prstGeom prst="roundRect">
+            <a:avLst>
+              <a:gd name="adj" fmla="val 5333"/>
+            </a:avLst>
+          </a:prstGeom>
+          <a:solidFill>
+            <a:srgbClr val="FFFFFF"/>
+          </a:solidFill>
+          <a:ln w="15240">
+            <a:solidFill>
+              <a:srgbClr val="1F3A4D"/>
+            </a:solidFill>
+            <a:prstDash val="solid"/>
+          </a:ln>
+        </p:spPr>
+      </p:sp>
+      <p:sp>
+        <p:nvSpPr>
+          <p:cNvPr id="15" name="Text 13"/>
+          <p:cNvSpPr/>
+          <p:nvPr/>
+        </p:nvSpPr>
+        <p:spPr>
+          <a:xfrm>
+            <a:off x="4800600" y="2907792"/>
+            <a:ext cx="1554480" cy="457200"/>
+          </a:xfrm>
+          <a:prstGeom prst="rect">
+            <a:avLst/>
+          </a:prstGeom>
+          <a:noFill/>
+          <a:ln/>
+        </p:spPr>
+        <p:txBody>
+          <a:bodyPr wrap="square" lIns="0" tIns="0" rIns="0" bIns="0" rtlCol="0" anchor="ctr"/>
+          <a:lstStyle/>
+          <a:p>
+            <a:pPr algn="ctr" indent="0" marL="0">
+              <a:buNone/>
+            </a:pPr>
+            <a:r>
+              <a:rPr lang="en-US" sz="1250" b="1" dirty="0">
+                <a:solidFill>
+                  <a:srgbClr val="17232E"/>
+                </a:solidFill>
+                <a:latin typeface="Calibri" pitchFamily="34" charset="0"/>
+                <a:ea typeface="Calibri" pitchFamily="34" charset="-122"/>
+                <a:cs typeface="Calibri" pitchFamily="34" charset="-120"/>
+              </a:rPr>
+              <a:t>Amazon SQS</a:t>
+            </a:r>
+            <a:endParaRPr lang="en-US" sz="1250" dirty="0"/>
+          </a:p>
+        </p:txBody>
+      </p:sp>
+      <p:sp>
+        <p:nvSpPr>
+          <p:cNvPr id="16" name="Text 14"/>
+          <p:cNvSpPr/>
+          <p:nvPr/>
+        </p:nvSpPr>
+        <p:spPr>
+          <a:xfrm>
+            <a:off x="4828032" y="3401568"/>
+            <a:ext cx="1499616" cy="457200"/>
+          </a:xfrm>
+          <a:prstGeom prst="rect">
+            <a:avLst/>
+          </a:prstGeom>
+          <a:noFill/>
+          <a:ln/>
+        </p:spPr>
+        <p:txBody>
+          <a:bodyPr wrap="square" lIns="0" tIns="0" rIns="0" bIns="0" rtlCol="0" anchor="ctr"/>
+          <a:lstStyle/>
+          <a:p>
+            <a:pPr algn="ctr" indent="0" marL="0">
+              <a:buNone/>
+            </a:pPr>
+            <a:r>
+              <a:rPr lang="en-US" sz="900" dirty="0">
+                <a:solidFill>
+                  <a:srgbClr val="5E6E78"/>
+                </a:solidFill>
+                <a:latin typeface="Calibri" pitchFamily="34" charset="0"/>
+                <a:ea typeface="Calibri" pitchFamily="34" charset="-122"/>
+                <a:cs typeface="Calibri" pitchFamily="34" charset="-120"/>
+              </a:rPr>
+              <a:t>aggregate queue</a:t>
+            </a:r>
+            <a:endParaRPr lang="en-US" sz="900" dirty="0"/>
+          </a:p>
+        </p:txBody>
+      </p:sp>
+      <p:sp>
+        <p:nvSpPr>
+          <p:cNvPr id="17" name="Shape 15"/>
+          <p:cNvSpPr/>
+          <p:nvPr/>
+        </p:nvSpPr>
+        <p:spPr>
+          <a:xfrm>
+            <a:off x="6318504" y="3337560"/>
+            <a:ext cx="164592" cy="0"/>
+          </a:xfrm>
+          <a:prstGeom prst="line">
+            <a:avLst/>
+          </a:prstGeom>
+          <a:noFill/>
+          <a:ln w="20320">
             <a:solidFill>
               <a:srgbClr val="5E8399"/>
             </a:solidFill>
@@ -1721,26 +2070,26 @@
       </p:sp>
       <p:sp>
         <p:nvSpPr>
-          <p:cNvPr id="8" name="Shape 6"/>
-          <p:cNvSpPr/>
-          <p:nvPr/>
-        </p:nvSpPr>
-        <p:spPr>
-          <a:xfrm>
-            <a:off x="2507833" y="2468880"/>
-            <a:ext cx="1572768" cy="1371600"/>
+          <p:cNvPr id="18" name="Shape 16"/>
+          <p:cNvSpPr/>
+          <p:nvPr/>
+        </p:nvSpPr>
+        <p:spPr>
+          <a:xfrm>
+            <a:off x="6492240" y="2651760"/>
+            <a:ext cx="1463040" cy="1371600"/>
           </a:xfrm>
           <a:prstGeom prst="roundRect">
             <a:avLst>
-              <a:gd name="adj" fmla="val 6667"/>
+              <a:gd name="adj" fmla="val 5333"/>
             </a:avLst>
           </a:prstGeom>
           <a:solidFill>
-            <a:srgbClr val="EEF3F6"/>
-          </a:solidFill>
-          <a:ln w="19050">
+            <a:srgbClr val="FFFFFF"/>
+          </a:solidFill>
+          <a:ln w="15240">
             <a:solidFill>
-              <a:srgbClr val="5E8399"/>
+              <a:srgbClr val="1F3A4D"/>
             </a:solidFill>
             <a:prstDash val="solid"/>
           </a:ln>
@@ -1748,34 +2097,14 @@
       </p:sp>
       <p:sp>
         <p:nvSpPr>
-          <p:cNvPr id="9" name="Shape 7"/>
-          <p:cNvSpPr/>
-          <p:nvPr/>
-        </p:nvSpPr>
-        <p:spPr>
-          <a:xfrm>
-            <a:off x="3202777" y="2633472"/>
-            <a:ext cx="182880" cy="182880"/>
-          </a:xfrm>
-          <a:prstGeom prst="ellipse">
-            <a:avLst/>
-          </a:prstGeom>
-          <a:solidFill>
-            <a:srgbClr val="5E8399"/>
-          </a:solidFill>
-          <a:ln/>
-        </p:spPr>
-      </p:sp>
-      <p:sp>
-        <p:nvSpPr>
-          <p:cNvPr id="10" name="Text 8"/>
-          <p:cNvSpPr/>
-          <p:nvPr/>
-        </p:nvSpPr>
-        <p:spPr>
-          <a:xfrm>
-            <a:off x="2480401" y="2852928"/>
-            <a:ext cx="1627632" cy="365760"/>
+          <p:cNvPr id="19" name="Text 17"/>
+          <p:cNvSpPr/>
+          <p:nvPr/>
+        </p:nvSpPr>
+        <p:spPr>
+          <a:xfrm>
+            <a:off x="6446520" y="2907792"/>
+            <a:ext cx="1554480" cy="457200"/>
           </a:xfrm>
           <a:prstGeom prst="rect">
             <a:avLst/>
@@ -1791,7 +2120,7 @@
               <a:buNone/>
             </a:pPr>
             <a:r>
-              <a:rPr lang="en-US" sz="1450" b="1" dirty="0">
+              <a:rPr lang="en-US" sz="1250" b="1" dirty="0">
                 <a:solidFill>
                   <a:srgbClr val="17232E"/>
                 </a:solidFill>
@@ -1799,38 +2128,38 @@
                 <a:ea typeface="Calibri" pitchFamily="34" charset="-122"/>
                 <a:cs typeface="Calibri" pitchFamily="34" charset="-120"/>
               </a:rPr>
-              <a:t>Fog relay</a:t>
-            </a:r>
-            <a:endParaRPr lang="en-US" sz="1450" dirty="0"/>
-          </a:p>
-        </p:txBody>
-      </p:sp>
-      <p:sp>
-        <p:nvSpPr>
-          <p:cNvPr id="11" name="Text 9"/>
-          <p:cNvSpPr/>
-          <p:nvPr/>
-        </p:nvSpPr>
-        <p:spPr>
-          <a:xfrm>
-            <a:off x="2507833" y="3200400"/>
-            <a:ext cx="1572768" cy="411480"/>
-          </a:xfrm>
-          <a:prstGeom prst="rect">
-            <a:avLst/>
-          </a:prstGeom>
-          <a:noFill/>
-          <a:ln/>
-        </p:spPr>
-        <p:txBody>
-          <a:bodyPr wrap="square" lIns="0" tIns="0" rIns="0" bIns="0" rtlCol="0" anchor="t"/>
+              <a:t>AWS Lambda</a:t>
+            </a:r>
+            <a:endParaRPr lang="en-US" sz="1250" dirty="0"/>
+          </a:p>
+        </p:txBody>
+      </p:sp>
+      <p:sp>
+        <p:nvSpPr>
+          <p:cNvPr id="20" name="Text 18"/>
+          <p:cNvSpPr/>
+          <p:nvPr/>
+        </p:nvSpPr>
+        <p:spPr>
+          <a:xfrm>
+            <a:off x="6473952" y="3401568"/>
+            <a:ext cx="1499616" cy="457200"/>
+          </a:xfrm>
+          <a:prstGeom prst="rect">
+            <a:avLst/>
+          </a:prstGeom>
+          <a:noFill/>
+          <a:ln/>
+        </p:spPr>
+        <p:txBody>
+          <a:bodyPr wrap="square" lIns="0" tIns="0" rIns="0" bIns="0" rtlCol="0" anchor="ctr"/>
           <a:lstStyle/>
           <a:p>
             <a:pPr algn="ctr" indent="0" marL="0">
               <a:buNone/>
             </a:pPr>
             <a:r>
-              <a:rPr lang="en-US" sz="1050" dirty="0">
+              <a:rPr lang="en-US" sz="900" dirty="0">
                 <a:solidFill>
                   <a:srgbClr val="5E6E78"/>
                 </a:solidFill>
@@ -1838,28 +2167,28 @@
                 <a:ea typeface="Calibri" pitchFamily="34" charset="-122"/>
                 <a:cs typeface="Calibri" pitchFamily="34" charset="-120"/>
               </a:rPr>
-              <a:t>10 s windows · 5 rules</a:t>
-            </a:r>
-            <a:endParaRPr lang="en-US" sz="1050" dirty="0"/>
-          </a:p>
-        </p:txBody>
-      </p:sp>
-      <p:sp>
-        <p:nvSpPr>
-          <p:cNvPr id="12" name="Shape 10"/>
-          <p:cNvSpPr/>
-          <p:nvPr/>
-        </p:nvSpPr>
-        <p:spPr>
-          <a:xfrm>
-            <a:off x="4098889" y="3154680"/>
-            <a:ext cx="258409" cy="0"/>
+              <a:t>java17 ingest</a:t>
+            </a:r>
+            <a:endParaRPr lang="en-US" sz="900" dirty="0"/>
+          </a:p>
+        </p:txBody>
+      </p:sp>
+      <p:sp>
+        <p:nvSpPr>
+          <p:cNvPr id="21" name="Shape 19"/>
+          <p:cNvSpPr/>
+          <p:nvPr/>
+        </p:nvSpPr>
+        <p:spPr>
+          <a:xfrm>
+            <a:off x="7964424" y="3337560"/>
+            <a:ext cx="164592" cy="0"/>
           </a:xfrm>
           <a:prstGeom prst="line">
             <a:avLst/>
           </a:prstGeom>
           <a:noFill/>
-          <a:ln w="25400">
+          <a:ln w="20320">
             <a:solidFill>
               <a:srgbClr val="5E8399"/>
             </a:solidFill>
@@ -1870,24 +2199,24 @@
       </p:sp>
       <p:sp>
         <p:nvSpPr>
-          <p:cNvPr id="13" name="Shape 11"/>
-          <p:cNvSpPr/>
-          <p:nvPr/>
-        </p:nvSpPr>
-        <p:spPr>
-          <a:xfrm>
-            <a:off x="4375587" y="2468880"/>
-            <a:ext cx="1572768" cy="1371600"/>
+          <p:cNvPr id="22" name="Shape 20"/>
+          <p:cNvSpPr/>
+          <p:nvPr/>
+        </p:nvSpPr>
+        <p:spPr>
+          <a:xfrm>
+            <a:off x="8138160" y="2651760"/>
+            <a:ext cx="1463040" cy="1371600"/>
           </a:xfrm>
           <a:prstGeom prst="roundRect">
             <a:avLst>
-              <a:gd name="adj" fmla="val 6667"/>
+              <a:gd name="adj" fmla="val 5333"/>
             </a:avLst>
           </a:prstGeom>
           <a:solidFill>
-            <a:srgbClr val="EEF3F6"/>
-          </a:solidFill>
-          <a:ln w="19050">
+            <a:srgbClr val="FFFFFF"/>
+          </a:solidFill>
+          <a:ln w="15240">
             <a:solidFill>
               <a:srgbClr val="1F3A4D"/>
             </a:solidFill>
@@ -1897,34 +2226,14 @@
       </p:sp>
       <p:sp>
         <p:nvSpPr>
-          <p:cNvPr id="14" name="Shape 12"/>
-          <p:cNvSpPr/>
-          <p:nvPr/>
-        </p:nvSpPr>
-        <p:spPr>
-          <a:xfrm>
-            <a:off x="5070531" y="2633472"/>
-            <a:ext cx="182880" cy="182880"/>
-          </a:xfrm>
-          <a:prstGeom prst="ellipse">
-            <a:avLst/>
-          </a:prstGeom>
-          <a:solidFill>
-            <a:srgbClr val="1F3A4D"/>
-          </a:solidFill>
-          <a:ln/>
-        </p:spPr>
-      </p:sp>
-      <p:sp>
-        <p:nvSpPr>
-          <p:cNvPr id="15" name="Text 13"/>
-          <p:cNvSpPr/>
-          <p:nvPr/>
-        </p:nvSpPr>
-        <p:spPr>
-          <a:xfrm>
-            <a:off x="4348155" y="2852928"/>
-            <a:ext cx="1627632" cy="365760"/>
+          <p:cNvPr id="23" name="Text 21"/>
+          <p:cNvSpPr/>
+          <p:nvPr/>
+        </p:nvSpPr>
+        <p:spPr>
+          <a:xfrm>
+            <a:off x="8092440" y="2907792"/>
+            <a:ext cx="1554480" cy="457200"/>
           </a:xfrm>
           <a:prstGeom prst="rect">
             <a:avLst/>
@@ -1940,7 +2249,7 @@
               <a:buNone/>
             </a:pPr>
             <a:r>
-              <a:rPr lang="en-US" sz="1450" b="1" dirty="0">
+              <a:rPr lang="en-US" sz="1250" b="1" dirty="0">
                 <a:solidFill>
                   <a:srgbClr val="17232E"/>
                 </a:solidFill>
@@ -1948,38 +2257,38 @@
                 <a:ea typeface="Calibri" pitchFamily="34" charset="-122"/>
                 <a:cs typeface="Calibri" pitchFamily="34" charset="-120"/>
               </a:rPr>
-              <a:t>Amazon SQS</a:t>
-            </a:r>
-            <a:endParaRPr lang="en-US" sz="1450" dirty="0"/>
-          </a:p>
-        </p:txBody>
-      </p:sp>
-      <p:sp>
-        <p:nvSpPr>
-          <p:cNvPr id="16" name="Text 14"/>
-          <p:cNvSpPr/>
-          <p:nvPr/>
-        </p:nvSpPr>
-        <p:spPr>
-          <a:xfrm>
-            <a:off x="4375587" y="3200400"/>
-            <a:ext cx="1572768" cy="411480"/>
-          </a:xfrm>
-          <a:prstGeom prst="rect">
-            <a:avLst/>
-          </a:prstGeom>
-          <a:noFill/>
-          <a:ln/>
-        </p:spPr>
-        <p:txBody>
-          <a:bodyPr wrap="square" lIns="0" tIns="0" rIns="0" bIns="0" rtlCol="0" anchor="t"/>
+              <a:t>DynamoDB</a:t>
+            </a:r>
+            <a:endParaRPr lang="en-US" sz="1250" dirty="0"/>
+          </a:p>
+        </p:txBody>
+      </p:sp>
+      <p:sp>
+        <p:nvSpPr>
+          <p:cNvPr id="24" name="Text 22"/>
+          <p:cNvSpPr/>
+          <p:nvPr/>
+        </p:nvSpPr>
+        <p:spPr>
+          <a:xfrm>
+            <a:off x="8119872" y="3401568"/>
+            <a:ext cx="1499616" cy="457200"/>
+          </a:xfrm>
+          <a:prstGeom prst="rect">
+            <a:avLst/>
+          </a:prstGeom>
+          <a:noFill/>
+          <a:ln/>
+        </p:spPr>
+        <p:txBody>
+          <a:bodyPr wrap="square" lIns="0" tIns="0" rIns="0" bIns="0" rtlCol="0" anchor="ctr"/>
           <a:lstStyle/>
           <a:p>
             <a:pPr algn="ctr" indent="0" marL="0">
               <a:buNone/>
             </a:pPr>
             <a:r>
-              <a:rPr lang="en-US" sz="1050" dirty="0">
+              <a:rPr lang="en-US" sz="900" dirty="0">
                 <a:solidFill>
                   <a:srgbClr val="5E6E78"/>
                 </a:solidFill>
@@ -1987,28 +2296,28 @@
                 <a:ea typeface="Calibri" pitchFamily="34" charset="-122"/>
                 <a:cs typeface="Calibri" pitchFamily="34" charset="-120"/>
               </a:rPr>
-              <a:t>aggregate queue</a:t>
-            </a:r>
-            <a:endParaRPr lang="en-US" sz="1050" dirty="0"/>
-          </a:p>
-        </p:txBody>
-      </p:sp>
-      <p:sp>
-        <p:nvSpPr>
-          <p:cNvPr id="17" name="Shape 15"/>
-          <p:cNvSpPr/>
-          <p:nvPr/>
-        </p:nvSpPr>
-        <p:spPr>
-          <a:xfrm>
-            <a:off x="5966643" y="3154680"/>
-            <a:ext cx="258409" cy="0"/>
+              <a:t>durable store</a:t>
+            </a:r>
+            <a:endParaRPr lang="en-US" sz="900" dirty="0"/>
+          </a:p>
+        </p:txBody>
+      </p:sp>
+      <p:sp>
+        <p:nvSpPr>
+          <p:cNvPr id="25" name="Shape 23"/>
+          <p:cNvSpPr/>
+          <p:nvPr/>
+        </p:nvSpPr>
+        <p:spPr>
+          <a:xfrm>
+            <a:off x="9610344" y="3337560"/>
+            <a:ext cx="164592" cy="0"/>
           </a:xfrm>
           <a:prstGeom prst="line">
             <a:avLst/>
           </a:prstGeom>
           <a:noFill/>
-          <a:ln w="25400">
+          <a:ln w="20320">
             <a:solidFill>
               <a:srgbClr val="5E8399"/>
             </a:solidFill>
@@ -2019,322 +2328,24 @@
       </p:sp>
       <p:sp>
         <p:nvSpPr>
-          <p:cNvPr id="18" name="Shape 16"/>
-          <p:cNvSpPr/>
-          <p:nvPr/>
-        </p:nvSpPr>
-        <p:spPr>
-          <a:xfrm>
-            <a:off x="6243340" y="2468880"/>
-            <a:ext cx="1572768" cy="1371600"/>
+          <p:cNvPr id="26" name="Shape 24"/>
+          <p:cNvSpPr/>
+          <p:nvPr/>
+        </p:nvSpPr>
+        <p:spPr>
+          <a:xfrm>
+            <a:off x="9784080" y="2651760"/>
+            <a:ext cx="1463040" cy="1371600"/>
           </a:xfrm>
           <a:prstGeom prst="roundRect">
             <a:avLst>
-              <a:gd name="adj" fmla="val 6667"/>
+              <a:gd name="adj" fmla="val 5333"/>
             </a:avLst>
           </a:prstGeom>
           <a:solidFill>
-            <a:srgbClr val="EEF3F6"/>
-          </a:solidFill>
-          <a:ln w="19050">
-            <a:solidFill>
-              <a:srgbClr val="1F3A4D"/>
-            </a:solidFill>
-            <a:prstDash val="solid"/>
-          </a:ln>
-        </p:spPr>
-      </p:sp>
-      <p:sp>
-        <p:nvSpPr>
-          <p:cNvPr id="19" name="Shape 17"/>
-          <p:cNvSpPr/>
-          <p:nvPr/>
-        </p:nvSpPr>
-        <p:spPr>
-          <a:xfrm>
-            <a:off x="6938284" y="2633472"/>
-            <a:ext cx="182880" cy="182880"/>
-          </a:xfrm>
-          <a:prstGeom prst="ellipse">
-            <a:avLst/>
-          </a:prstGeom>
-          <a:solidFill>
-            <a:srgbClr val="1F3A4D"/>
-          </a:solidFill>
-          <a:ln/>
-        </p:spPr>
-      </p:sp>
-      <p:sp>
-        <p:nvSpPr>
-          <p:cNvPr id="20" name="Text 18"/>
-          <p:cNvSpPr/>
-          <p:nvPr/>
-        </p:nvSpPr>
-        <p:spPr>
-          <a:xfrm>
-            <a:off x="6215908" y="2852928"/>
-            <a:ext cx="1627632" cy="365760"/>
-          </a:xfrm>
-          <a:prstGeom prst="rect">
-            <a:avLst/>
-          </a:prstGeom>
-          <a:noFill/>
-          <a:ln/>
-        </p:spPr>
-        <p:txBody>
-          <a:bodyPr wrap="square" lIns="0" tIns="0" rIns="0" bIns="0" rtlCol="0" anchor="ctr"/>
-          <a:lstStyle/>
-          <a:p>
-            <a:pPr algn="ctr" indent="0" marL="0">
-              <a:buNone/>
-            </a:pPr>
-            <a:r>
-              <a:rPr lang="en-US" sz="1450" b="1" dirty="0">
-                <a:solidFill>
-                  <a:srgbClr val="17232E"/>
-                </a:solidFill>
-                <a:latin typeface="Calibri" pitchFamily="34" charset="0"/>
-                <a:ea typeface="Calibri" pitchFamily="34" charset="-122"/>
-                <a:cs typeface="Calibri" pitchFamily="34" charset="-120"/>
-              </a:rPr>
-              <a:t>AWS Lambda</a:t>
-            </a:r>
-            <a:endParaRPr lang="en-US" sz="1450" dirty="0"/>
-          </a:p>
-        </p:txBody>
-      </p:sp>
-      <p:sp>
-        <p:nvSpPr>
-          <p:cNvPr id="21" name="Text 19"/>
-          <p:cNvSpPr/>
-          <p:nvPr/>
-        </p:nvSpPr>
-        <p:spPr>
-          <a:xfrm>
-            <a:off x="6243340" y="3200400"/>
-            <a:ext cx="1572768" cy="411480"/>
-          </a:xfrm>
-          <a:prstGeom prst="rect">
-            <a:avLst/>
-          </a:prstGeom>
-          <a:noFill/>
-          <a:ln/>
-        </p:spPr>
-        <p:txBody>
-          <a:bodyPr wrap="square" lIns="0" tIns="0" rIns="0" bIns="0" rtlCol="0" anchor="t"/>
-          <a:lstStyle/>
-          <a:p>
-            <a:pPr algn="ctr" indent="0" marL="0">
-              <a:buNone/>
-            </a:pPr>
-            <a:r>
-              <a:rPr lang="en-US" sz="1050" dirty="0">
-                <a:solidFill>
-                  <a:srgbClr val="5E6E78"/>
-                </a:solidFill>
-                <a:latin typeface="Calibri" pitchFamily="34" charset="0"/>
-                <a:ea typeface="Calibri" pitchFamily="34" charset="-122"/>
-                <a:cs typeface="Calibri" pitchFamily="34" charset="-120"/>
-              </a:rPr>
-              <a:t>java17 ingest</a:t>
-            </a:r>
-            <a:endParaRPr lang="en-US" sz="1050" dirty="0"/>
-          </a:p>
-        </p:txBody>
-      </p:sp>
-      <p:sp>
-        <p:nvSpPr>
-          <p:cNvPr id="22" name="Shape 20"/>
-          <p:cNvSpPr/>
-          <p:nvPr/>
-        </p:nvSpPr>
-        <p:spPr>
-          <a:xfrm>
-            <a:off x="7834396" y="3154680"/>
-            <a:ext cx="258409" cy="0"/>
-          </a:xfrm>
-          <a:prstGeom prst="line">
-            <a:avLst/>
-          </a:prstGeom>
-          <a:noFill/>
-          <a:ln w="25400">
-            <a:solidFill>
-              <a:srgbClr val="5E8399"/>
-            </a:solidFill>
-            <a:prstDash val="solid"/>
-            <a:tailEnd type="triangle"/>
-          </a:ln>
-        </p:spPr>
-      </p:sp>
-      <p:sp>
-        <p:nvSpPr>
-          <p:cNvPr id="23" name="Shape 21"/>
-          <p:cNvSpPr/>
-          <p:nvPr/>
-        </p:nvSpPr>
-        <p:spPr>
-          <a:xfrm>
-            <a:off x="8111094" y="2468880"/>
-            <a:ext cx="1572768" cy="1371600"/>
-          </a:xfrm>
-          <a:prstGeom prst="roundRect">
-            <a:avLst>
-              <a:gd name="adj" fmla="val 6667"/>
-            </a:avLst>
-          </a:prstGeom>
-          <a:solidFill>
-            <a:srgbClr val="EEF3F6"/>
-          </a:solidFill>
-          <a:ln w="19050">
-            <a:solidFill>
-              <a:srgbClr val="1F3A4D"/>
-            </a:solidFill>
-            <a:prstDash val="solid"/>
-          </a:ln>
-        </p:spPr>
-      </p:sp>
-      <p:sp>
-        <p:nvSpPr>
-          <p:cNvPr id="24" name="Shape 22"/>
-          <p:cNvSpPr/>
-          <p:nvPr/>
-        </p:nvSpPr>
-        <p:spPr>
-          <a:xfrm>
-            <a:off x="8806038" y="2633472"/>
-            <a:ext cx="182880" cy="182880"/>
-          </a:xfrm>
-          <a:prstGeom prst="ellipse">
-            <a:avLst/>
-          </a:prstGeom>
-          <a:solidFill>
-            <a:srgbClr val="1F3A4D"/>
-          </a:solidFill>
-          <a:ln/>
-        </p:spPr>
-      </p:sp>
-      <p:sp>
-        <p:nvSpPr>
-          <p:cNvPr id="25" name="Text 23"/>
-          <p:cNvSpPr/>
-          <p:nvPr/>
-        </p:nvSpPr>
-        <p:spPr>
-          <a:xfrm>
-            <a:off x="8083662" y="2852928"/>
-            <a:ext cx="1627632" cy="365760"/>
-          </a:xfrm>
-          <a:prstGeom prst="rect">
-            <a:avLst/>
-          </a:prstGeom>
-          <a:noFill/>
-          <a:ln/>
-        </p:spPr>
-        <p:txBody>
-          <a:bodyPr wrap="square" lIns="0" tIns="0" rIns="0" bIns="0" rtlCol="0" anchor="ctr"/>
-          <a:lstStyle/>
-          <a:p>
-            <a:pPr algn="ctr" indent="0" marL="0">
-              <a:buNone/>
-            </a:pPr>
-            <a:r>
-              <a:rPr lang="en-US" sz="1450" b="1" dirty="0">
-                <a:solidFill>
-                  <a:srgbClr val="17232E"/>
-                </a:solidFill>
-                <a:latin typeface="Calibri" pitchFamily="34" charset="0"/>
-                <a:ea typeface="Calibri" pitchFamily="34" charset="-122"/>
-                <a:cs typeface="Calibri" pitchFamily="34" charset="-120"/>
-              </a:rPr>
-              <a:t>DynamoDB</a:t>
-            </a:r>
-            <a:endParaRPr lang="en-US" sz="1450" dirty="0"/>
-          </a:p>
-        </p:txBody>
-      </p:sp>
-      <p:sp>
-        <p:nvSpPr>
-          <p:cNvPr id="26" name="Text 24"/>
-          <p:cNvSpPr/>
-          <p:nvPr/>
-        </p:nvSpPr>
-        <p:spPr>
-          <a:xfrm>
-            <a:off x="8111094" y="3200400"/>
-            <a:ext cx="1572768" cy="411480"/>
-          </a:xfrm>
-          <a:prstGeom prst="rect">
-            <a:avLst/>
-          </a:prstGeom>
-          <a:noFill/>
-          <a:ln/>
-        </p:spPr>
-        <p:txBody>
-          <a:bodyPr wrap="square" lIns="0" tIns="0" rIns="0" bIns="0" rtlCol="0" anchor="t"/>
-          <a:lstStyle/>
-          <a:p>
-            <a:pPr algn="ctr" indent="0" marL="0">
-              <a:buNone/>
-            </a:pPr>
-            <a:r>
-              <a:rPr lang="en-US" sz="1050" dirty="0">
-                <a:solidFill>
-                  <a:srgbClr val="5E6E78"/>
-                </a:solidFill>
-                <a:latin typeface="Calibri" pitchFamily="34" charset="0"/>
-                <a:ea typeface="Calibri" pitchFamily="34" charset="-122"/>
-                <a:cs typeface="Calibri" pitchFamily="34" charset="-120"/>
-              </a:rPr>
-              <a:t>durable store</a:t>
-            </a:r>
-            <a:endParaRPr lang="en-US" sz="1050" dirty="0"/>
-          </a:p>
-        </p:txBody>
-      </p:sp>
-      <p:sp>
-        <p:nvSpPr>
-          <p:cNvPr id="27" name="Shape 25"/>
-          <p:cNvSpPr/>
-          <p:nvPr/>
-        </p:nvSpPr>
-        <p:spPr>
-          <a:xfrm>
-            <a:off x="9702150" y="3154680"/>
-            <a:ext cx="258409" cy="0"/>
-          </a:xfrm>
-          <a:prstGeom prst="line">
-            <a:avLst/>
-          </a:prstGeom>
-          <a:noFill/>
-          <a:ln w="25400">
-            <a:solidFill>
-              <a:srgbClr val="5E8399"/>
-            </a:solidFill>
-            <a:prstDash val="solid"/>
-            <a:tailEnd type="triangle"/>
-          </a:ln>
-        </p:spPr>
-      </p:sp>
-      <p:sp>
-        <p:nvSpPr>
-          <p:cNvPr id="28" name="Shape 26"/>
-          <p:cNvSpPr/>
-          <p:nvPr/>
-        </p:nvSpPr>
-        <p:spPr>
-          <a:xfrm>
-            <a:off x="9978847" y="2468880"/>
-            <a:ext cx="1572768" cy="1371600"/>
-          </a:xfrm>
-          <a:prstGeom prst="roundRect">
-            <a:avLst>
-              <a:gd name="adj" fmla="val 6667"/>
-            </a:avLst>
-          </a:prstGeom>
-          <a:solidFill>
-            <a:srgbClr val="EEF3F6"/>
-          </a:solidFill>
-          <a:ln w="19050">
+            <a:srgbClr val="FFFFFF"/>
+          </a:solidFill>
+          <a:ln w="15240">
             <a:solidFill>
               <a:srgbClr val="2E5E78"/>
             </a:solidFill>
@@ -2344,34 +2355,14 @@
       </p:sp>
       <p:sp>
         <p:nvSpPr>
-          <p:cNvPr id="29" name="Shape 27"/>
-          <p:cNvSpPr/>
-          <p:nvPr/>
-        </p:nvSpPr>
-        <p:spPr>
-          <a:xfrm>
-            <a:off x="10673791" y="2633472"/>
-            <a:ext cx="182880" cy="182880"/>
-          </a:xfrm>
-          <a:prstGeom prst="ellipse">
-            <a:avLst/>
-          </a:prstGeom>
-          <a:solidFill>
-            <a:srgbClr val="2E5E78"/>
-          </a:solidFill>
-          <a:ln/>
-        </p:spPr>
-      </p:sp>
-      <p:sp>
-        <p:nvSpPr>
-          <p:cNvPr id="30" name="Text 28"/>
-          <p:cNvSpPr/>
-          <p:nvPr/>
-        </p:nvSpPr>
-        <p:spPr>
-          <a:xfrm>
-            <a:off x="9951415" y="2852928"/>
-            <a:ext cx="1627632" cy="365760"/>
+          <p:cNvPr id="27" name="Text 25"/>
+          <p:cNvSpPr/>
+          <p:nvPr/>
+        </p:nvSpPr>
+        <p:spPr>
+          <a:xfrm>
+            <a:off x="9738360" y="2907792"/>
+            <a:ext cx="1554480" cy="457200"/>
           </a:xfrm>
           <a:prstGeom prst="rect">
             <a:avLst/>
@@ -2387,7 +2378,7 @@
               <a:buNone/>
             </a:pPr>
             <a:r>
-              <a:rPr lang="en-US" sz="1450" b="1" dirty="0">
+              <a:rPr lang="en-US" sz="1250" b="1" dirty="0">
                 <a:solidFill>
                   <a:srgbClr val="17232E"/>
                 </a:solidFill>
@@ -2397,36 +2388,36 @@
               </a:rPr>
               <a:t>API GW + S3</a:t>
             </a:r>
-            <a:endParaRPr lang="en-US" sz="1450" dirty="0"/>
-          </a:p>
-        </p:txBody>
-      </p:sp>
-      <p:sp>
-        <p:nvSpPr>
-          <p:cNvPr id="31" name="Text 29"/>
-          <p:cNvSpPr/>
-          <p:nvPr/>
-        </p:nvSpPr>
-        <p:spPr>
-          <a:xfrm>
-            <a:off x="9978847" y="3200400"/>
-            <a:ext cx="1572768" cy="411480"/>
-          </a:xfrm>
-          <a:prstGeom prst="rect">
-            <a:avLst/>
-          </a:prstGeom>
-          <a:noFill/>
-          <a:ln/>
-        </p:spPr>
-        <p:txBody>
-          <a:bodyPr wrap="square" lIns="0" tIns="0" rIns="0" bIns="0" rtlCol="0" anchor="t"/>
+            <a:endParaRPr lang="en-US" sz="1250" dirty="0"/>
+          </a:p>
+        </p:txBody>
+      </p:sp>
+      <p:sp>
+        <p:nvSpPr>
+          <p:cNvPr id="28" name="Text 26"/>
+          <p:cNvSpPr/>
+          <p:nvPr/>
+        </p:nvSpPr>
+        <p:spPr>
+          <a:xfrm>
+            <a:off x="9765792" y="3401568"/>
+            <a:ext cx="1499616" cy="457200"/>
+          </a:xfrm>
+          <a:prstGeom prst="rect">
+            <a:avLst/>
+          </a:prstGeom>
+          <a:noFill/>
+          <a:ln/>
+        </p:spPr>
+        <p:txBody>
+          <a:bodyPr wrap="square" lIns="0" tIns="0" rIns="0" bIns="0" rtlCol="0" anchor="ctr"/>
           <a:lstStyle/>
           <a:p>
             <a:pPr algn="ctr" indent="0" marL="0">
               <a:buNone/>
             </a:pPr>
             <a:r>
-              <a:rPr lang="en-US" sz="1050" dirty="0">
+              <a:rPr lang="en-US" sz="900" dirty="0">
                 <a:solidFill>
                   <a:srgbClr val="5E6E78"/>
                 </a:solidFill>
@@ -2436,91 +2427,13 @@
               </a:rPr>
               <a:t>city dashboard</a:t>
             </a:r>
-            <a:endParaRPr lang="en-US" sz="1050" dirty="0"/>
-          </a:p>
-        </p:txBody>
-      </p:sp>
-      <p:sp>
-        <p:nvSpPr>
-          <p:cNvPr id="32" name="Text 30"/>
-          <p:cNvSpPr/>
-          <p:nvPr/>
-        </p:nvSpPr>
-        <p:spPr>
-          <a:xfrm>
-            <a:off x="640080" y="3977640"/>
-            <a:ext cx="3440521" cy="274320"/>
-          </a:xfrm>
-          <a:prstGeom prst="rect">
-            <a:avLst/>
-          </a:prstGeom>
-          <a:noFill/>
-          <a:ln/>
-        </p:spPr>
-        <p:txBody>
-          <a:bodyPr wrap="square" rtlCol="0" anchor="ctr"/>
-          <a:lstStyle/>
-          <a:p>
-            <a:pPr algn="ctr" indent="0" marL="0">
-              <a:buNone/>
-            </a:pPr>
-            <a:r>
-              <a:rPr lang="en-US" sz="1100" b="1" spc="200" kern="0" dirty="0">
-                <a:solidFill>
-                  <a:srgbClr val="5E8399"/>
-                </a:solidFill>
-                <a:latin typeface="Calibri" pitchFamily="34" charset="0"/>
-                <a:ea typeface="Calibri" pitchFamily="34" charset="-122"/>
-                <a:cs typeface="Calibri" pitchFamily="34" charset="-120"/>
-              </a:rPr>
-              <a:t>EDGE</a:t>
-            </a:r>
-            <a:endParaRPr lang="en-US" sz="1100" dirty="0"/>
-          </a:p>
-        </p:txBody>
-      </p:sp>
-      <p:sp>
-        <p:nvSpPr>
-          <p:cNvPr id="33" name="Text 31"/>
-          <p:cNvSpPr/>
-          <p:nvPr/>
-        </p:nvSpPr>
-        <p:spPr>
-          <a:xfrm>
-            <a:off x="4375587" y="3977640"/>
-            <a:ext cx="7176028" cy="274320"/>
-          </a:xfrm>
-          <a:prstGeom prst="rect">
-            <a:avLst/>
-          </a:prstGeom>
-          <a:noFill/>
-          <a:ln/>
-        </p:spPr>
-        <p:txBody>
-          <a:bodyPr wrap="square" rtlCol="0" anchor="ctr"/>
-          <a:lstStyle/>
-          <a:p>
-            <a:pPr algn="ctr" indent="0" marL="0">
-              <a:buNone/>
-            </a:pPr>
-            <a:r>
-              <a:rPr lang="en-US" sz="1100" b="1" spc="200" kern="0" dirty="0">
-                <a:solidFill>
-                  <a:srgbClr val="1F3A4D"/>
-                </a:solidFill>
-                <a:latin typeface="Calibri" pitchFamily="34" charset="0"/>
-                <a:ea typeface="Calibri" pitchFamily="34" charset="-122"/>
-                <a:cs typeface="Calibri" pitchFamily="34" charset="-120"/>
-              </a:rPr>
-              <a:t>CLOUD</a:t>
-            </a:r>
-            <a:endParaRPr lang="en-US" sz="1100" dirty="0"/>
-          </a:p>
-        </p:txBody>
-      </p:sp>
-      <p:sp>
-        <p:nvSpPr>
-          <p:cNvPr id="34" name="Text 32"/>
+            <a:endParaRPr lang="en-US" sz="900" dirty="0"/>
+          </a:p>
+        </p:txBody>
+      </p:sp>
+      <p:sp>
+        <p:nvSpPr>
+          <p:cNvPr id="29" name="Text 27"/>
           <p:cNvSpPr/>
           <p:nvPr/>
         </p:nvSpPr>

--- a/ppt/MohammedHassanAhmed_X25100963_smart-city-monitoring.pptx
+++ b/ppt/MohammedHassanAhmed_X25100963_smart-city-monitoring.pptx
@@ -2588,8 +2588,35 @@
         </p:nvSpPr>
         <p:spPr>
           <a:xfrm>
-            <a:off x="731520" y="1965960"/>
-            <a:ext cx="685800" cy="685800"/>
+            <a:off x="640080" y="1874520"/>
+            <a:ext cx="3502152" cy="3977640"/>
+          </a:xfrm>
+          <a:prstGeom prst="roundRect">
+            <a:avLst>
+              <a:gd name="adj" fmla="val 2611"/>
+            </a:avLst>
+          </a:prstGeom>
+          <a:solidFill>
+            <a:srgbClr val="EEF3F6"/>
+          </a:solidFill>
+          <a:ln w="15240">
+            <a:solidFill>
+              <a:srgbClr val="2E5E78"/>
+            </a:solidFill>
+            <a:prstDash val="solid"/>
+          </a:ln>
+        </p:spPr>
+      </p:sp>
+      <p:sp>
+        <p:nvSpPr>
+          <p:cNvPr id="5" name="Shape 3"/>
+          <p:cNvSpPr/>
+          <p:nvPr/>
+        </p:nvSpPr>
+        <p:spPr>
+          <a:xfrm>
+            <a:off x="914400" y="2148840"/>
+            <a:ext cx="603504" cy="603504"/>
           </a:xfrm>
           <a:prstGeom prst="ellipse">
             <a:avLst/>
@@ -2602,14 +2629,14 @@
       </p:sp>
       <p:sp>
         <p:nvSpPr>
-          <p:cNvPr id="5" name="Text 3"/>
-          <p:cNvSpPr/>
-          <p:nvPr/>
-        </p:nvSpPr>
-        <p:spPr>
-          <a:xfrm>
-            <a:off x="731520" y="1965960"/>
-            <a:ext cx="685800" cy="685800"/>
+          <p:cNvPr id="6" name="Text 4"/>
+          <p:cNvSpPr/>
+          <p:nvPr/>
+        </p:nvSpPr>
+        <p:spPr>
+          <a:xfrm>
+            <a:off x="914400" y="2148840"/>
+            <a:ext cx="603504" cy="603504"/>
           </a:xfrm>
           <a:prstGeom prst="rect">
             <a:avLst/>
@@ -2625,7 +2652,7 @@
               <a:buNone/>
             </a:pPr>
             <a:r>
-              <a:rPr lang="en-US" sz="2600" b="1" dirty="0">
+              <a:rPr lang="en-US" sz="2200" b="1" dirty="0">
                 <a:solidFill>
                   <a:srgbClr val="FFFFFF"/>
                 </a:solidFill>
@@ -2635,20 +2662,20 @@
               </a:rPr>
               <a:t>1</a:t>
             </a:r>
-            <a:endParaRPr lang="en-US" sz="2600" dirty="0"/>
-          </a:p>
-        </p:txBody>
-      </p:sp>
-      <p:sp>
-        <p:nvSpPr>
-          <p:cNvPr id="6" name="Text 4"/>
-          <p:cNvSpPr/>
-          <p:nvPr/>
-        </p:nvSpPr>
-        <p:spPr>
-          <a:xfrm>
-            <a:off x="1691640" y="1920240"/>
-            <a:ext cx="9875520" cy="411480"/>
+            <a:endParaRPr lang="en-US" sz="2200" dirty="0"/>
+          </a:p>
+        </p:txBody>
+      </p:sp>
+      <p:sp>
+        <p:nvSpPr>
+          <p:cNvPr id="7" name="Text 5"/>
+          <p:cNvSpPr/>
+          <p:nvPr/>
+        </p:nvSpPr>
+        <p:spPr>
+          <a:xfrm>
+            <a:off x="914400" y="2898648"/>
+            <a:ext cx="2953512" cy="777240"/>
           </a:xfrm>
           <a:prstGeom prst="rect">
             <a:avLst/>
@@ -2664,7 +2691,7 @@
               <a:buNone/>
             </a:pPr>
             <a:r>
-              <a:rPr lang="en-US" sz="1800" b="1" dirty="0">
+              <a:rPr lang="en-US" sz="1600" b="1" dirty="0">
                 <a:solidFill>
                   <a:srgbClr val="17232E"/>
                 </a:solidFill>
@@ -2674,20 +2701,20 @@
               </a:rPr>
               <a:t>Two zones, five street metrics</a:t>
             </a:r>
-            <a:endParaRPr lang="en-US" sz="1800" dirty="0"/>
-          </a:p>
-        </p:txBody>
-      </p:sp>
-      <p:sp>
-        <p:nvSpPr>
-          <p:cNvPr id="7" name="Text 5"/>
-          <p:cNvSpPr/>
-          <p:nvPr/>
-        </p:nvSpPr>
-        <p:spPr>
-          <a:xfrm>
-            <a:off x="1691640" y="2340864"/>
-            <a:ext cx="9875520" cy="640080"/>
+            <a:endParaRPr lang="en-US" sz="1600" dirty="0"/>
+          </a:p>
+        </p:txBody>
+      </p:sp>
+      <p:sp>
+        <p:nvSpPr>
+          <p:cNvPr id="8" name="Text 6"/>
+          <p:cNvSpPr/>
+          <p:nvPr/>
+        </p:nvSpPr>
+        <p:spPr>
+          <a:xfrm>
+            <a:off x="914400" y="3657600"/>
+            <a:ext cx="2953512" cy="2011680"/>
           </a:xfrm>
           <a:prstGeom prst="rect">
             <a:avLst/>
@@ -2700,10 +2727,13 @@
           <a:lstStyle/>
           <a:p>
             <a:pPr indent="0" marL="0">
-              <a:buNone/>
-            </a:pPr>
-            <a:r>
-              <a:rPr lang="en-US" sz="1350" dirty="0">
+              <a:lnSpc>
+                <a:spcPct val="106000"/>
+              </a:lnSpc>
+              <a:buNone/>
+            </a:pPr>
+            <a:r>
+              <a:rPr lang="en-US" sz="1250" dirty="0">
                 <a:solidFill>
                   <a:srgbClr val="5E6E78"/>
                 </a:solidFill>
@@ -2713,20 +2743,47 @@
               </a:rPr>
               <a:t>Traffic, air quality, noise, parking and visibility live for both city zones, with citywide trend charts.</a:t>
             </a:r>
-            <a:endParaRPr lang="en-US" sz="1350" dirty="0"/>
-          </a:p>
-        </p:txBody>
-      </p:sp>
-      <p:sp>
-        <p:nvSpPr>
-          <p:cNvPr id="8" name="Shape 6"/>
-          <p:cNvSpPr/>
-          <p:nvPr/>
-        </p:nvSpPr>
-        <p:spPr>
-          <a:xfrm>
-            <a:off x="731520" y="3383280"/>
-            <a:ext cx="685800" cy="685800"/>
+            <a:endParaRPr lang="en-US" sz="1250" dirty="0"/>
+          </a:p>
+        </p:txBody>
+      </p:sp>
+      <p:sp>
+        <p:nvSpPr>
+          <p:cNvPr id="9" name="Shape 7"/>
+          <p:cNvSpPr/>
+          <p:nvPr/>
+        </p:nvSpPr>
+        <p:spPr>
+          <a:xfrm>
+            <a:off x="4416552" y="1874520"/>
+            <a:ext cx="3502152" cy="3977640"/>
+          </a:xfrm>
+          <a:prstGeom prst="roundRect">
+            <a:avLst>
+              <a:gd name="adj" fmla="val 2611"/>
+            </a:avLst>
+          </a:prstGeom>
+          <a:solidFill>
+            <a:srgbClr val="EEF3F6"/>
+          </a:solidFill>
+          <a:ln w="15240">
+            <a:solidFill>
+              <a:srgbClr val="2E5E78"/>
+            </a:solidFill>
+            <a:prstDash val="solid"/>
+          </a:ln>
+        </p:spPr>
+      </p:sp>
+      <p:sp>
+        <p:nvSpPr>
+          <p:cNvPr id="10" name="Shape 8"/>
+          <p:cNvSpPr/>
+          <p:nvPr/>
+        </p:nvSpPr>
+        <p:spPr>
+          <a:xfrm>
+            <a:off x="4690872" y="2148840"/>
+            <a:ext cx="603504" cy="603504"/>
           </a:xfrm>
           <a:prstGeom prst="ellipse">
             <a:avLst/>
@@ -2739,14 +2796,14 @@
       </p:sp>
       <p:sp>
         <p:nvSpPr>
-          <p:cNvPr id="9" name="Text 7"/>
-          <p:cNvSpPr/>
-          <p:nvPr/>
-        </p:nvSpPr>
-        <p:spPr>
-          <a:xfrm>
-            <a:off x="731520" y="3383280"/>
-            <a:ext cx="685800" cy="685800"/>
+          <p:cNvPr id="11" name="Text 9"/>
+          <p:cNvSpPr/>
+          <p:nvPr/>
+        </p:nvSpPr>
+        <p:spPr>
+          <a:xfrm>
+            <a:off x="4690872" y="2148840"/>
+            <a:ext cx="603504" cy="603504"/>
           </a:xfrm>
           <a:prstGeom prst="rect">
             <a:avLst/>
@@ -2762,7 +2819,7 @@
               <a:buNone/>
             </a:pPr>
             <a:r>
-              <a:rPr lang="en-US" sz="2600" b="1" dirty="0">
+              <a:rPr lang="en-US" sz="2200" b="1" dirty="0">
                 <a:solidFill>
                   <a:srgbClr val="FFFFFF"/>
                 </a:solidFill>
@@ -2772,20 +2829,20 @@
               </a:rPr>
               <a:t>2</a:t>
             </a:r>
-            <a:endParaRPr lang="en-US" sz="2600" dirty="0"/>
-          </a:p>
-        </p:txBody>
-      </p:sp>
-      <p:sp>
-        <p:nvSpPr>
-          <p:cNvPr id="10" name="Text 8"/>
-          <p:cNvSpPr/>
-          <p:nvPr/>
-        </p:nvSpPr>
-        <p:spPr>
-          <a:xfrm>
-            <a:off x="1691640" y="3337560"/>
-            <a:ext cx="9875520" cy="411480"/>
+            <a:endParaRPr lang="en-US" sz="2200" dirty="0"/>
+          </a:p>
+        </p:txBody>
+      </p:sp>
+      <p:sp>
+        <p:nvSpPr>
+          <p:cNvPr id="12" name="Text 10"/>
+          <p:cNvSpPr/>
+          <p:nvPr/>
+        </p:nvSpPr>
+        <p:spPr>
+          <a:xfrm>
+            <a:off x="4690872" y="2898648"/>
+            <a:ext cx="2953512" cy="777240"/>
           </a:xfrm>
           <a:prstGeom prst="rect">
             <a:avLst/>
@@ -2801,7 +2858,7 @@
               <a:buNone/>
             </a:pPr>
             <a:r>
-              <a:rPr lang="en-US" sz="1800" b="1" dirty="0">
+              <a:rPr lang="en-US" sz="1600" b="1" dirty="0">
                 <a:solidFill>
                   <a:srgbClr val="17232E"/>
                 </a:solidFill>
@@ -2811,20 +2868,20 @@
               </a:rPr>
               <a:t>Five alert rules firing live</a:t>
             </a:r>
-            <a:endParaRPr lang="en-US" sz="1800" dirty="0"/>
-          </a:p>
-        </p:txBody>
-      </p:sp>
-      <p:sp>
-        <p:nvSpPr>
-          <p:cNvPr id="11" name="Text 9"/>
-          <p:cNvSpPr/>
-          <p:nvPr/>
-        </p:nvSpPr>
-        <p:spPr>
-          <a:xfrm>
-            <a:off x="1691640" y="3758184"/>
-            <a:ext cx="9875520" cy="640080"/>
+            <a:endParaRPr lang="en-US" sz="1600" dirty="0"/>
+          </a:p>
+        </p:txBody>
+      </p:sp>
+      <p:sp>
+        <p:nvSpPr>
+          <p:cNvPr id="13" name="Text 11"/>
+          <p:cNvSpPr/>
+          <p:nvPr/>
+        </p:nvSpPr>
+        <p:spPr>
+          <a:xfrm>
+            <a:off x="4690872" y="3657600"/>
+            <a:ext cx="2953512" cy="2011680"/>
           </a:xfrm>
           <a:prstGeom prst="rect">
             <a:avLst/>
@@ -2837,10 +2894,13 @@
           <a:lstStyle/>
           <a:p>
             <a:pPr indent="0" marL="0">
-              <a:buNone/>
-            </a:pPr>
-            <a:r>
-              <a:rPr lang="en-US" sz="1350" dirty="0">
+              <a:lnSpc>
+                <a:spcPct val="106000"/>
+              </a:lnSpc>
+              <a:buNone/>
+            </a:pPr>
+            <a:r>
+              <a:rPr lang="en-US" sz="1250" dirty="0">
                 <a:solidFill>
                   <a:srgbClr val="5E6E78"/>
                 </a:solidFill>
@@ -2850,20 +2910,47 @@
               </a:rPr>
               <a:t>Congestion, air-quality, noise, parking and low-visibility alerts each raise the instant a zone's window crosses its threshold.</a:t>
             </a:r>
-            <a:endParaRPr lang="en-US" sz="1350" dirty="0"/>
-          </a:p>
-        </p:txBody>
-      </p:sp>
-      <p:sp>
-        <p:nvSpPr>
-          <p:cNvPr id="12" name="Shape 10"/>
-          <p:cNvSpPr/>
-          <p:nvPr/>
-        </p:nvSpPr>
-        <p:spPr>
-          <a:xfrm>
-            <a:off x="731520" y="4800600"/>
-            <a:ext cx="685800" cy="685800"/>
+            <a:endParaRPr lang="en-US" sz="1250" dirty="0"/>
+          </a:p>
+        </p:txBody>
+      </p:sp>
+      <p:sp>
+        <p:nvSpPr>
+          <p:cNvPr id="14" name="Shape 12"/>
+          <p:cNvSpPr/>
+          <p:nvPr/>
+        </p:nvSpPr>
+        <p:spPr>
+          <a:xfrm>
+            <a:off x="8193024" y="1874520"/>
+            <a:ext cx="3502152" cy="3977640"/>
+          </a:xfrm>
+          <a:prstGeom prst="roundRect">
+            <a:avLst>
+              <a:gd name="adj" fmla="val 2611"/>
+            </a:avLst>
+          </a:prstGeom>
+          <a:solidFill>
+            <a:srgbClr val="EEF3F6"/>
+          </a:solidFill>
+          <a:ln w="15240">
+            <a:solidFill>
+              <a:srgbClr val="2E5E78"/>
+            </a:solidFill>
+            <a:prstDash val="solid"/>
+          </a:ln>
+        </p:spPr>
+      </p:sp>
+      <p:sp>
+        <p:nvSpPr>
+          <p:cNvPr id="15" name="Shape 13"/>
+          <p:cNvSpPr/>
+          <p:nvPr/>
+        </p:nvSpPr>
+        <p:spPr>
+          <a:xfrm>
+            <a:off x="8467344" y="2148840"/>
+            <a:ext cx="603504" cy="603504"/>
           </a:xfrm>
           <a:prstGeom prst="ellipse">
             <a:avLst/>
@@ -2876,14 +2963,14 @@
       </p:sp>
       <p:sp>
         <p:nvSpPr>
-          <p:cNvPr id="13" name="Text 11"/>
-          <p:cNvSpPr/>
-          <p:nvPr/>
-        </p:nvSpPr>
-        <p:spPr>
-          <a:xfrm>
-            <a:off x="731520" y="4800600"/>
-            <a:ext cx="685800" cy="685800"/>
+          <p:cNvPr id="16" name="Text 14"/>
+          <p:cNvSpPr/>
+          <p:nvPr/>
+        </p:nvSpPr>
+        <p:spPr>
+          <a:xfrm>
+            <a:off x="8467344" y="2148840"/>
+            <a:ext cx="603504" cy="603504"/>
           </a:xfrm>
           <a:prstGeom prst="rect">
             <a:avLst/>
@@ -2899,7 +2986,7 @@
               <a:buNone/>
             </a:pPr>
             <a:r>
-              <a:rPr lang="en-US" sz="2600" b="1" dirty="0">
+              <a:rPr lang="en-US" sz="2200" b="1" dirty="0">
                 <a:solidFill>
                   <a:srgbClr val="FFFFFF"/>
                 </a:solidFill>
@@ -2909,20 +2996,20 @@
               </a:rPr>
               <a:t>3</a:t>
             </a:r>
-            <a:endParaRPr lang="en-US" sz="2600" dirty="0"/>
-          </a:p>
-        </p:txBody>
-      </p:sp>
-      <p:sp>
-        <p:nvSpPr>
-          <p:cNvPr id="14" name="Text 12"/>
-          <p:cNvSpPr/>
-          <p:nvPr/>
-        </p:nvSpPr>
-        <p:spPr>
-          <a:xfrm>
-            <a:off x="1691640" y="4754880"/>
-            <a:ext cx="9875520" cy="411480"/>
+            <a:endParaRPr lang="en-US" sz="2200" dirty="0"/>
+          </a:p>
+        </p:txBody>
+      </p:sp>
+      <p:sp>
+        <p:nvSpPr>
+          <p:cNvPr id="17" name="Text 15"/>
+          <p:cNvSpPr/>
+          <p:nvPr/>
+        </p:nvSpPr>
+        <p:spPr>
+          <a:xfrm>
+            <a:off x="8467344" y="2898648"/>
+            <a:ext cx="2953512" cy="777240"/>
           </a:xfrm>
           <a:prstGeom prst="rect">
             <a:avLst/>
@@ -2938,7 +3025,7 @@
               <a:buNone/>
             </a:pPr>
             <a:r>
-              <a:rPr lang="en-US" sz="1800" b="1" dirty="0">
+              <a:rPr lang="en-US" sz="1600" b="1" dirty="0">
                 <a:solidFill>
                   <a:srgbClr val="17232E"/>
                 </a:solidFill>
@@ -2948,20 +3035,20 @@
               </a:rPr>
               <a:t>A PM2.5 breach on real data</a:t>
             </a:r>
-            <a:endParaRPr lang="en-US" sz="1800" dirty="0"/>
-          </a:p>
-        </p:txBody>
-      </p:sp>
-      <p:sp>
-        <p:nvSpPr>
-          <p:cNvPr id="15" name="Text 13"/>
-          <p:cNvSpPr/>
-          <p:nvPr/>
-        </p:nvSpPr>
-        <p:spPr>
-          <a:xfrm>
-            <a:off x="1691640" y="5175504"/>
-            <a:ext cx="9875520" cy="640080"/>
+            <a:endParaRPr lang="en-US" sz="1600" dirty="0"/>
+          </a:p>
+        </p:txBody>
+      </p:sp>
+      <p:sp>
+        <p:nvSpPr>
+          <p:cNvPr id="18" name="Text 16"/>
+          <p:cNvSpPr/>
+          <p:nvPr/>
+        </p:nvSpPr>
+        <p:spPr>
+          <a:xfrm>
+            <a:off x="8467344" y="3657600"/>
+            <a:ext cx="2953512" cy="2011680"/>
           </a:xfrm>
           <a:prstGeom prst="rect">
             <a:avLst/>
@@ -2974,10 +3061,13 @@
           <a:lstStyle/>
           <a:p>
             <a:pPr indent="0" marL="0">
-              <a:buNone/>
-            </a:pPr>
-            <a:r>
-              <a:rPr lang="en-US" sz="1350" dirty="0">
+              <a:lnSpc>
+                <a:spcPct val="106000"/>
+              </a:lnSpc>
+              <a:buNone/>
+            </a:pPr>
+            <a:r>
+              <a:rPr lang="en-US" sz="1250" dirty="0">
                 <a:solidFill>
                   <a:srgbClr val="5E6E78"/>
                 </a:solidFill>
@@ -2987,46 +3077,7 @@
               </a:rPr>
               <a:t>Air quality tips over the 35 microgram limit on one zone and the air-quality alert appears within one ten-second window.</a:t>
             </a:r>
-            <a:endParaRPr lang="en-US" sz="1350" dirty="0"/>
-          </a:p>
-        </p:txBody>
-      </p:sp>
-      <p:sp>
-        <p:nvSpPr>
-          <p:cNvPr id="16" name="Text 14"/>
-          <p:cNvSpPr/>
-          <p:nvPr/>
-        </p:nvSpPr>
-        <p:spPr>
-          <a:xfrm>
-            <a:off x="640080" y="6263640"/>
-            <a:ext cx="10972800" cy="365760"/>
-          </a:xfrm>
-          <a:prstGeom prst="rect">
-            <a:avLst/>
-          </a:prstGeom>
-          <a:noFill/>
-          <a:ln/>
-        </p:spPr>
-        <p:txBody>
-          <a:bodyPr wrap="square" rtlCol="0" anchor="ctr"/>
-          <a:lstStyle/>
-          <a:p>
-            <a:pPr indent="0" marL="0">
-              <a:buNone/>
-            </a:pPr>
-            <a:r>
-              <a:rPr lang="en-US" sz="1300" i="1" dirty="0">
-                <a:solidFill>
-                  <a:srgbClr val="5E8399"/>
-                </a:solidFill>
-                <a:latin typeface="Calibri" pitchFamily="34" charset="0"/>
-                <a:ea typeface="Calibri" pitchFamily="34" charset="-122"/>
-                <a:cs typeface="Calibri" pitchFamily="34" charset="-120"/>
-              </a:rPr>
-              <a:t>Switch to the live dashboard here — backup video ready.</a:t>
-            </a:r>
-            <a:endParaRPr lang="en-US" sz="1300" dirty="0"/>
+            <a:endParaRPr lang="en-US" sz="1250" dirty="0"/>
           </a:p>
         </p:txBody>
       </p:sp>
@@ -3109,12 +3160,12 @@
         </p:nvSpPr>
         <p:spPr>
           <a:xfrm>
-            <a:off x="640080" y="1874520"/>
-            <a:ext cx="4937760" cy="4160520"/>
+            <a:off x="731520" y="1920240"/>
+            <a:ext cx="10698480" cy="1965960"/>
           </a:xfrm>
           <a:prstGeom prst="roundRect">
             <a:avLst>
-              <a:gd name="adj" fmla="val 2198"/>
+              <a:gd name="adj" fmla="val 4651"/>
             </a:avLst>
           </a:prstGeom>
           <a:solidFill>
@@ -3136,7 +3187,7 @@
         </p:nvSpPr>
         <p:spPr>
           <a:xfrm>
-            <a:off x="960120" y="2103120"/>
+            <a:off x="1005840" y="2103120"/>
             <a:ext cx="3657600" cy="457200"/>
           </a:xfrm>
           <a:prstGeom prst="rect">
@@ -3175,8 +3226,8 @@
         </p:nvSpPr>
         <p:spPr>
           <a:xfrm>
-            <a:off x="960120" y="2651760"/>
-            <a:ext cx="4343400" cy="3200400"/>
+            <a:off x="1005840" y="2578608"/>
+            <a:ext cx="9966960" cy="1188720"/>
           </a:xfrm>
           <a:prstGeom prst="rect">
             <a:avLst/>
@@ -3190,12 +3241,12 @@
           <a:p>
             <a:pPr indent="0" marL="0">
               <a:lnSpc>
-                <a:spcPct val="112000"/>
+                <a:spcPct val="105000"/>
               </a:lnSpc>
               <a:buNone/>
             </a:pPr>
             <a:r>
-              <a:rPr lang="en-US" sz="1350" dirty="0">
+              <a:rPr lang="en-US" sz="1300" dirty="0">
                 <a:solidFill>
                   <a:srgbClr val="17232E"/>
                 </a:solidFill>
@@ -3205,7 +3256,7 @@
               </a:rPr>
               <a:t>Sensor posts run on four parallel threads while a timer swaps the window buffer out for flushing. A reading landing mid-swap can be written into the retired buffer after the flush has already read it — and it simply vanishes. Nothing fails; one number is just quietly missing.</a:t>
             </a:r>
-            <a:endParaRPr lang="en-US" sz="1350" dirty="0"/>
+            <a:endParaRPr lang="en-US" sz="1300" dirty="0"/>
           </a:p>
         </p:txBody>
       </p:sp>
@@ -3217,12 +3268,12 @@
         </p:nvSpPr>
         <p:spPr>
           <a:xfrm>
-            <a:off x="6611112" y="1874520"/>
-            <a:ext cx="4937760" cy="4160520"/>
+            <a:off x="731520" y="4041648"/>
+            <a:ext cx="10698480" cy="1965960"/>
           </a:xfrm>
           <a:prstGeom prst="roundRect">
             <a:avLst>
-              <a:gd name="adj" fmla="val 2198"/>
+              <a:gd name="adj" fmla="val 4651"/>
             </a:avLst>
           </a:prstGeom>
           <a:solidFill>
@@ -3244,7 +3295,7 @@
         </p:nvSpPr>
         <p:spPr>
           <a:xfrm>
-            <a:off x="6931152" y="2103120"/>
+            <a:off x="1005840" y="4224528"/>
             <a:ext cx="3657600" cy="457200"/>
           </a:xfrm>
           <a:prstGeom prst="rect">
@@ -3283,8 +3334,8 @@
         </p:nvSpPr>
         <p:spPr>
           <a:xfrm>
-            <a:off x="6931152" y="2651760"/>
-            <a:ext cx="4343400" cy="3200400"/>
+            <a:off x="1005840" y="4700016"/>
+            <a:ext cx="9966960" cy="1188720"/>
           </a:xfrm>
           <a:prstGeom prst="rect">
             <a:avLst/>
@@ -3298,12 +3349,12 @@
           <a:p>
             <a:pPr indent="0" marL="0">
               <a:lnSpc>
-                <a:spcPct val="112000"/>
+                <a:spcPct val="105000"/>
               </a:lnSpc>
               <a:buNone/>
             </a:pPr>
             <a:r>
-              <a:rPr lang="en-US" sz="1350" dirty="0">
+              <a:rPr lang="en-US" sz="1300" dirty="0">
                 <a:solidFill>
                   <a:srgbClr val="17232E"/>
                 </a:solidFill>
@@ -3313,29 +3364,9 @@
               </a:rPr>
               <a:t>Each buffer became a fenced generation: the flush closes the fence, waits for writers already inside to finish, then reads; a writer arriving after the fence retries into the fresh buffer. The ingest path stays lock-free and every reading lands in exactly one window.</a:t>
             </a:r>
-            <a:endParaRPr lang="en-US" sz="1350" dirty="0"/>
-          </a:p>
-        </p:txBody>
-      </p:sp>
-      <p:sp>
-        <p:nvSpPr>
-          <p:cNvPr id="9" name="Shape 7"/>
-          <p:cNvSpPr/>
-          <p:nvPr/>
-        </p:nvSpPr>
-        <p:spPr>
-          <a:xfrm>
-            <a:off x="5669280" y="3703320"/>
-            <a:ext cx="841248" cy="512064"/>
-          </a:xfrm>
-          <a:prstGeom prst="rightArrow">
-            <a:avLst/>
-          </a:prstGeom>
-          <a:solidFill>
-            <a:srgbClr val="1F3A4D"/>
-          </a:solidFill>
-          <a:ln/>
-        </p:spPr>
+            <a:endParaRPr lang="en-US" sz="1300" dirty="0"/>
+          </a:p>
+        </p:txBody>
       </p:sp>
     </p:spTree>
   </p:cSld>

--- a/ppt/MohammedHassanAhmed_X25100963_smart-city-monitoring.pptx
+++ b/ppt/MohammedHassanAhmed_X25100963_smart-city-monitoring.pptx
@@ -1487,17 +1487,6 @@
             <a:pPr indent="0" marL="0">
               <a:buNone/>
             </a:pPr>
-            <a:r>
-              <a:rPr lang="en-US" sz="1250" dirty="0">
-                <a:solidFill>
-                  <a:srgbClr val="5E6E78"/>
-                </a:solidFill>
-                <a:latin typeface="Calibri" pitchFamily="34" charset="0"/>
-                <a:ea typeface="Calibri" pitchFamily="34" charset="-122"/>
-                <a:cs typeface="Calibri" pitchFamily="34" charset="-120"/>
-              </a:rPr>
-              <a:t>Fog &amp; Edge Computing (H9FECC)   ·   deployed live on AWS</a:t>
-            </a:r>
             <a:endParaRPr lang="en-US" sz="1250" dirty="0"/>
           </a:p>
         </p:txBody>
